--- a/teacher-led/materials/teacher-slides.pptx
+++ b/teacher-led/materials/teacher-slides.pptx
@@ -2,34 +2,34 @@
 <file path=ppt/presentation.xml><?xml version="1.0" encoding="utf-8"?>
 <p:presentation xmlns:p="http://schemas.openxmlformats.org/presentationml/2006/main">
   <p:sldMasterIdLst>
-    <p:sldMasterId xmlns:r="http://schemas.openxmlformats.org/officeDocument/2006/relationships" id="2147483648" r:id="R43256b3e5b62417a"/>
+    <p:sldMasterId xmlns:r="http://schemas.openxmlformats.org/officeDocument/2006/relationships" id="2147483648" r:id="Rf4cfd5d9f5af4366"/>
   </p:sldMasterIdLst>
   <p:notesMasterIdLst>
-    <p:notesMasterId xmlns:r="http://schemas.openxmlformats.org/officeDocument/2006/relationships" r:id="R045f4433efc44314"/>
+    <p:notesMasterId xmlns:r="http://schemas.openxmlformats.org/officeDocument/2006/relationships" r:id="Re45e24573cee4f1d"/>
   </p:notesMasterIdLst>
   <p:sldIdLst>
-    <p:sldId xmlns:r="http://schemas.openxmlformats.org/officeDocument/2006/relationships" id="256" r:id="Rae763890dc98452e"/>
-    <p:sldId xmlns:r="http://schemas.openxmlformats.org/officeDocument/2006/relationships" id="257" r:id="R72a8adfd3c654769"/>
-    <p:sldId xmlns:r="http://schemas.openxmlformats.org/officeDocument/2006/relationships" id="258" r:id="R5867d2cfef8e4347"/>
-    <p:sldId xmlns:r="http://schemas.openxmlformats.org/officeDocument/2006/relationships" id="259" r:id="Rdbaeecca57814abf"/>
-    <p:sldId xmlns:r="http://schemas.openxmlformats.org/officeDocument/2006/relationships" id="260" r:id="R5cc94a88d3b846a3"/>
-    <p:sldId xmlns:r="http://schemas.openxmlformats.org/officeDocument/2006/relationships" id="261" r:id="Re482f0d4f97d4116"/>
-    <p:sldId xmlns:r="http://schemas.openxmlformats.org/officeDocument/2006/relationships" id="262" r:id="Rf1b2bb3b576d4e4c"/>
-    <p:sldId xmlns:r="http://schemas.openxmlformats.org/officeDocument/2006/relationships" id="263" r:id="R3999c038f1a744f8"/>
-    <p:sldId xmlns:r="http://schemas.openxmlformats.org/officeDocument/2006/relationships" id="264" r:id="R62853bf7693c4656"/>
-    <p:sldId xmlns:r="http://schemas.openxmlformats.org/officeDocument/2006/relationships" id="265" r:id="R937656d09ca44323"/>
-    <p:sldId xmlns:r="http://schemas.openxmlformats.org/officeDocument/2006/relationships" id="266" r:id="R734644b05571410c"/>
-    <p:sldId xmlns:r="http://schemas.openxmlformats.org/officeDocument/2006/relationships" id="267" r:id="R27810131240341e0"/>
-    <p:sldId xmlns:r="http://schemas.openxmlformats.org/officeDocument/2006/relationships" id="268" r:id="Rf824ae0b9b15470f"/>
-    <p:sldId xmlns:r="http://schemas.openxmlformats.org/officeDocument/2006/relationships" id="269" r:id="Re2616a3d13b44f7c"/>
-    <p:sldId xmlns:r="http://schemas.openxmlformats.org/officeDocument/2006/relationships" id="270" r:id="R29c390b3d24d4ef9"/>
-    <p:sldId xmlns:r="http://schemas.openxmlformats.org/officeDocument/2006/relationships" id="271" r:id="R559987fedf394318"/>
-    <p:sldId xmlns:r="http://schemas.openxmlformats.org/officeDocument/2006/relationships" id="272" r:id="R9b887bfe9f9d4559"/>
-    <p:sldId xmlns:r="http://schemas.openxmlformats.org/officeDocument/2006/relationships" id="273" r:id="R85115526344f4bc3"/>
-    <p:sldId xmlns:r="http://schemas.openxmlformats.org/officeDocument/2006/relationships" id="274" r:id="R2b25474a4d3041a5"/>
-    <p:sldId xmlns:r="http://schemas.openxmlformats.org/officeDocument/2006/relationships" id="275" r:id="R98a4bd94f7dd4a42"/>
-    <p:sldId xmlns:r="http://schemas.openxmlformats.org/officeDocument/2006/relationships" id="276" r:id="R0f7f0bc4ef524cfe"/>
-    <p:sldId xmlns:r="http://schemas.openxmlformats.org/officeDocument/2006/relationships" id="277" r:id="R4ec00370e60047d9"/>
+    <p:sldId xmlns:r="http://schemas.openxmlformats.org/officeDocument/2006/relationships" id="256" r:id="R81d6531d6c7a4bfb"/>
+    <p:sldId xmlns:r="http://schemas.openxmlformats.org/officeDocument/2006/relationships" id="257" r:id="R45a5dac402894098"/>
+    <p:sldId xmlns:r="http://schemas.openxmlformats.org/officeDocument/2006/relationships" id="258" r:id="Rcd2ab13319d94ac0"/>
+    <p:sldId xmlns:r="http://schemas.openxmlformats.org/officeDocument/2006/relationships" id="259" r:id="Rfd646b42fcd0423e"/>
+    <p:sldId xmlns:r="http://schemas.openxmlformats.org/officeDocument/2006/relationships" id="260" r:id="R5e8c343a194547a0"/>
+    <p:sldId xmlns:r="http://schemas.openxmlformats.org/officeDocument/2006/relationships" id="261" r:id="R08af112875a54b94"/>
+    <p:sldId xmlns:r="http://schemas.openxmlformats.org/officeDocument/2006/relationships" id="262" r:id="R01747ff9f7b44794"/>
+    <p:sldId xmlns:r="http://schemas.openxmlformats.org/officeDocument/2006/relationships" id="263" r:id="Rb031e6abdc9f4c71"/>
+    <p:sldId xmlns:r="http://schemas.openxmlformats.org/officeDocument/2006/relationships" id="264" r:id="R3712be69afc54233"/>
+    <p:sldId xmlns:r="http://schemas.openxmlformats.org/officeDocument/2006/relationships" id="265" r:id="R804fdec4785f4f57"/>
+    <p:sldId xmlns:r="http://schemas.openxmlformats.org/officeDocument/2006/relationships" id="266" r:id="Rdb772f2f6db645cd"/>
+    <p:sldId xmlns:r="http://schemas.openxmlformats.org/officeDocument/2006/relationships" id="267" r:id="Rb23af5b2cc37404c"/>
+    <p:sldId xmlns:r="http://schemas.openxmlformats.org/officeDocument/2006/relationships" id="268" r:id="Rf4467a0c8e8d43d6"/>
+    <p:sldId xmlns:r="http://schemas.openxmlformats.org/officeDocument/2006/relationships" id="269" r:id="R07645064819f4faf"/>
+    <p:sldId xmlns:r="http://schemas.openxmlformats.org/officeDocument/2006/relationships" id="270" r:id="R3added7f019d4f83"/>
+    <p:sldId xmlns:r="http://schemas.openxmlformats.org/officeDocument/2006/relationships" id="271" r:id="R30fdb617e03f4150"/>
+    <p:sldId xmlns:r="http://schemas.openxmlformats.org/officeDocument/2006/relationships" id="272" r:id="Rad45ce1850d343b1"/>
+    <p:sldId xmlns:r="http://schemas.openxmlformats.org/officeDocument/2006/relationships" id="273" r:id="Rfe91d74b357645e0"/>
+    <p:sldId xmlns:r="http://schemas.openxmlformats.org/officeDocument/2006/relationships" id="274" r:id="R5e48e5d5d3044d5a"/>
+    <p:sldId xmlns:r="http://schemas.openxmlformats.org/officeDocument/2006/relationships" id="275" r:id="R4c790ef12cd84a7c"/>
+    <p:sldId xmlns:r="http://schemas.openxmlformats.org/officeDocument/2006/relationships" id="276" r:id="R4390436b18d84194"/>
+    <p:sldId xmlns:r="http://schemas.openxmlformats.org/officeDocument/2006/relationships" id="277" r:id="Rb9b1e94002e24289"/>
   </p:sldIdLst>
   <p:sldSz cx="12192000" cy="6858000"/>
   <p:notesSz cx="6858000" cy="9144000"/>
@@ -1278,7 +1278,7 @@
           <a:lstStyle xmlns:a="http://schemas.openxmlformats.org/drawingml/2006/main"/>
           <a:p xmlns:a="http://schemas.openxmlformats.org/drawingml/2006/main">
             <a:r>
-              <a:t>保留校內教材四個重點，其中法規與在地安全融入前兩個主題。請學生使用紙本活動單，全班依教師進度進行。校內主要來源：楊梅高中-114交通安全課程模組(何友友).docx「主題內容重點」；114-2學期楊梅高中交通安全教學教案-何友友.docx「貳、陸、捌、玖」。</a:t>
+              <a:t>將校內四個原有主題整合為兩個複習重點。以「楊光梅好」諧音「陽光美好」連結青春與未來，說明安全第一是守住這一切的前提。請學生使用紙本活動單，全班依教師進度進行。校內主要來源：楊梅高中-114交通安全課程模組(何友友).docx「主題內容重點」；114-2學期楊梅高中交通安全教學教案-何友友.docx「貳、陸、捌、玖」。</a:t>
             </a:r>
           </a:p>
         </p:txBody>
@@ -2105,7 +2105,7 @@
           <p:cNvPr id="3" name="Title">
             <a:extLst xmlns:a="http://schemas.openxmlformats.org/drawingml/2006/main">
               <a:ext uri="{FF2B5EF4-FFF2-40B4-BE49-F238E27FC236}">
-                <a16:creationId xmlns:a16="http://schemas.microsoft.com/office/drawing/2014/main" id="{65869E73-E16B-4F70-A4D0-57FB455961A5}"/>
+                <a16:creationId xmlns:a16="http://schemas.microsoft.com/office/drawing/2014/main" id="{56059DF7-DDCD-48AC-92C9-EF00657E770C}"/>
               </a:ext>
             </a:extLst>
           </p:cNvPr>
@@ -2262,7 +2262,7 @@
           <p:cNvPr id="2" name="Subtitle">
             <a:extLst xmlns:a="http://schemas.openxmlformats.org/drawingml/2006/main">
               <a:ext uri="{FF2B5EF4-FFF2-40B4-BE49-F238E27FC236}">
-                <a16:creationId xmlns:a16="http://schemas.microsoft.com/office/drawing/2014/main" id="{8A7BD7D2-EE98-47E7-AB5F-5372D5D5D8F3}"/>
+                <a16:creationId xmlns:a16="http://schemas.microsoft.com/office/drawing/2014/main" id="{52FC7C2F-B2D4-4BBF-939F-77260F0A0FC4}"/>
               </a:ext>
             </a:extLst>
           </p:cNvPr>
@@ -2436,7 +2436,7 @@
           <p:cNvPr id="2" name="Section title">
             <a:extLst xmlns:a="http://schemas.openxmlformats.org/drawingml/2006/main">
               <a:ext uri="{FF2B5EF4-FFF2-40B4-BE49-F238E27FC236}">
-                <a16:creationId xmlns:a16="http://schemas.microsoft.com/office/drawing/2014/main" id="{ED9030A4-0082-48B5-B102-EBF94263EC35}"/>
+                <a16:creationId xmlns:a16="http://schemas.microsoft.com/office/drawing/2014/main" id="{9B6D2C20-28A6-43FA-8F89-4A8BA9AFB444}"/>
               </a:ext>
             </a:extLst>
           </p:cNvPr>
@@ -2610,7 +2610,7 @@
           <p:cNvPr id="3" name="Title">
             <a:extLst xmlns:a="http://schemas.openxmlformats.org/drawingml/2006/main">
               <a:ext uri="{FF2B5EF4-FFF2-40B4-BE49-F238E27FC236}">
-                <a16:creationId xmlns:a16="http://schemas.microsoft.com/office/drawing/2014/main" id="{F0BF596F-8033-43B4-BA7D-1C3C54A3CB50}"/>
+                <a16:creationId xmlns:a16="http://schemas.microsoft.com/office/drawing/2014/main" id="{E320668D-F549-4292-A390-531463B4CF21}"/>
               </a:ext>
             </a:extLst>
           </p:cNvPr>
@@ -2767,7 +2767,7 @@
           <p:cNvPr id="2" name="Body">
             <a:extLst xmlns:a="http://schemas.openxmlformats.org/drawingml/2006/main">
               <a:ext uri="{FF2B5EF4-FFF2-40B4-BE49-F238E27FC236}">
-                <a16:creationId xmlns:a16="http://schemas.microsoft.com/office/drawing/2014/main" id="{5C25E995-6C36-4A0B-B72B-4A25460F2055}"/>
+                <a16:creationId xmlns:a16="http://schemas.microsoft.com/office/drawing/2014/main" id="{CA770A05-F755-43F2-96EF-643CF90D8FE8}"/>
               </a:ext>
             </a:extLst>
           </p:cNvPr>
@@ -2941,7 +2941,7 @@
           <p:cNvPr id="4" name="Title">
             <a:extLst xmlns:a="http://schemas.openxmlformats.org/drawingml/2006/main">
               <a:ext uri="{FF2B5EF4-FFF2-40B4-BE49-F238E27FC236}">
-                <a16:creationId xmlns:a16="http://schemas.microsoft.com/office/drawing/2014/main" id="{B674AF69-7162-4ABE-80CE-212E1CB2DF10}"/>
+                <a16:creationId xmlns:a16="http://schemas.microsoft.com/office/drawing/2014/main" id="{EE0AF77B-C4D0-48AE-95CA-E9A21CFEA78F}"/>
               </a:ext>
             </a:extLst>
           </p:cNvPr>
@@ -3098,7 +3098,7 @@
           <p:cNvPr id="2" name="Left column">
             <a:extLst xmlns:a="http://schemas.openxmlformats.org/drawingml/2006/main">
               <a:ext uri="{FF2B5EF4-FFF2-40B4-BE49-F238E27FC236}">
-                <a16:creationId xmlns:a16="http://schemas.microsoft.com/office/drawing/2014/main" id="{48FE3ACF-D209-456A-8177-DF5B255B767E}"/>
+                <a16:creationId xmlns:a16="http://schemas.microsoft.com/office/drawing/2014/main" id="{EDDD254E-A125-4C6C-891F-CCF21241DF56}"/>
               </a:ext>
             </a:extLst>
           </p:cNvPr>
@@ -3255,7 +3255,7 @@
           <p:cNvPr id="3" name="Right column">
             <a:extLst xmlns:a="http://schemas.openxmlformats.org/drawingml/2006/main">
               <a:ext uri="{FF2B5EF4-FFF2-40B4-BE49-F238E27FC236}">
-                <a16:creationId xmlns:a16="http://schemas.microsoft.com/office/drawing/2014/main" id="{DC6D0765-34F1-4F31-AE33-5252D92227AF}"/>
+                <a16:creationId xmlns:a16="http://schemas.microsoft.com/office/drawing/2014/main" id="{AE0DA841-AC37-4A1B-9CAE-A71802A2F62A}"/>
               </a:ext>
             </a:extLst>
           </p:cNvPr>
@@ -3429,7 +3429,7 @@
           <p:cNvPr id="3" name="Title">
             <a:extLst xmlns:a="http://schemas.openxmlformats.org/drawingml/2006/main">
               <a:ext uri="{FF2B5EF4-FFF2-40B4-BE49-F238E27FC236}">
-                <a16:creationId xmlns:a16="http://schemas.microsoft.com/office/drawing/2014/main" id="{59E77ECB-C7FC-49D5-87E7-3F14D225E0D7}"/>
+                <a16:creationId xmlns:a16="http://schemas.microsoft.com/office/drawing/2014/main" id="{9CE8F500-2D7A-4FE8-9B99-0EB7626DF5B3}"/>
               </a:ext>
             </a:extLst>
           </p:cNvPr>
@@ -3586,7 +3586,7 @@
           <p:cNvPr id="2" name="Left column">
             <a:extLst xmlns:a="http://schemas.openxmlformats.org/drawingml/2006/main">
               <a:ext uri="{FF2B5EF4-FFF2-40B4-BE49-F238E27FC236}">
-                <a16:creationId xmlns:a16="http://schemas.microsoft.com/office/drawing/2014/main" id="{634B4B07-49F5-4632-9828-AA49C17A1B04}"/>
+                <a16:creationId xmlns:a16="http://schemas.microsoft.com/office/drawing/2014/main" id="{89B130C1-96EC-48F4-8753-32B43BF1B3F1}"/>
               </a:ext>
             </a:extLst>
           </p:cNvPr>
@@ -3781,12 +3781,12 @@
   </p:cSld>
   <p:clrMap bg1="lt1" tx1="dk1" bg2="lt2" tx2="dk2" accent1="accent1" accent2="accent2" accent3="accent3" accent4="accent4" accent5="accent5" accent6="accent6" hlink="hlink" folHlink="folHlink"/>
   <p:sldLayoutIdLst>
-    <p:sldLayoutId xmlns:r="http://schemas.openxmlformats.org/officeDocument/2006/relationships" id="2147483649" r:id="R2b329c6c900f4695"/>
-    <p:sldLayoutId xmlns:r="http://schemas.openxmlformats.org/officeDocument/2006/relationships" id="2147483650" r:id="Re0f4496e61be4899"/>
-    <p:sldLayoutId xmlns:r="http://schemas.openxmlformats.org/officeDocument/2006/relationships" id="2147483651" r:id="R2850af83d46a4479"/>
-    <p:sldLayoutId xmlns:r="http://schemas.openxmlformats.org/officeDocument/2006/relationships" id="2147483652" r:id="R13ea6641ec39464c"/>
-    <p:sldLayoutId xmlns:r="http://schemas.openxmlformats.org/officeDocument/2006/relationships" id="2147483653" r:id="Re7921ae4a4b34cab"/>
-    <p:sldLayoutId xmlns:r="http://schemas.openxmlformats.org/officeDocument/2006/relationships" id="2147483654" r:id="R9cd54dd34d1d414d"/>
+    <p:sldLayoutId xmlns:r="http://schemas.openxmlformats.org/officeDocument/2006/relationships" id="2147483649" r:id="R1e135c6bd47d4c44"/>
+    <p:sldLayoutId xmlns:r="http://schemas.openxmlformats.org/officeDocument/2006/relationships" id="2147483650" r:id="R219f5aca85a84627"/>
+    <p:sldLayoutId xmlns:r="http://schemas.openxmlformats.org/officeDocument/2006/relationships" id="2147483651" r:id="R793bec6a26cd4508"/>
+    <p:sldLayoutId xmlns:r="http://schemas.openxmlformats.org/officeDocument/2006/relationships" id="2147483652" r:id="Re31f66640fdc4e18"/>
+    <p:sldLayoutId xmlns:r="http://schemas.openxmlformats.org/officeDocument/2006/relationships" id="2147483653" r:id="R2150e1db6fe24225"/>
+    <p:sldLayoutId xmlns:r="http://schemas.openxmlformats.org/officeDocument/2006/relationships" id="2147483654" r:id="R76e4f3757f184d75"/>
   </p:sldLayoutIdLst>
   <p:txStyles>
     <p:titleStyle>
@@ -4337,7 +4337,7 @@
           <p:cNvPr id="5" name="">
             <a:extLst xmlns:a="http://schemas.openxmlformats.org/drawingml/2006/main">
               <a:ext uri="{FF2B5EF4-FFF2-40B4-BE49-F238E27FC236}">
-                <a16:creationId xmlns:a16="http://schemas.microsoft.com/office/drawing/2014/main" id="{773935E1-8182-4F5E-98C6-CA5FED17C29D}"/>
+                <a16:creationId xmlns:a16="http://schemas.microsoft.com/office/drawing/2014/main" id="{39A71E73-A66B-4A06-8337-DB1800159988}"/>
               </a:ext>
             </a:extLst>
           </p:cNvPr>
@@ -4347,7 +4347,7 @@
           <p:nvPr/>
         </p:nvPicPr>
         <p:blipFill>
-          <a:blip xmlns:r="http://schemas.openxmlformats.org/officeDocument/2006/relationships" xmlns:a="http://schemas.openxmlformats.org/drawingml/2006/main" r:embed="R387998e82d8d4a30"/>
+          <a:blip xmlns:r="http://schemas.openxmlformats.org/officeDocument/2006/relationships" xmlns:a="http://schemas.openxmlformats.org/drawingml/2006/main" r:embed="R127cbaeb52bd4528"/>
           <a:srcRect xmlns:a="http://schemas.openxmlformats.org/drawingml/2006/main" l="0" t="27" r="0" b="27"/>
           <a:stretch xmlns:a="http://schemas.openxmlformats.org/drawingml/2006/main">
             <a:fillRect l="0" t="0" r="0" b="0"/>
@@ -4368,7 +4368,7 @@
           <p:cNvPr id="2" name="">
             <a:extLst xmlns:a="http://schemas.openxmlformats.org/drawingml/2006/main">
               <a:ext uri="{FF2B5EF4-FFF2-40B4-BE49-F238E27FC236}">
-                <a16:creationId xmlns:a16="http://schemas.microsoft.com/office/drawing/2014/main" id="{5A9C47B2-9FF5-4C05-870A-AA8F31F484E3}"/>
+                <a16:creationId xmlns:a16="http://schemas.microsoft.com/office/drawing/2014/main" id="{CB220CF0-EABE-41B0-8722-048A080B92B1}"/>
               </a:ext>
             </a:extLst>
           </p:cNvPr>
@@ -4426,7 +4426,7 @@
                 <a:ea typeface="Microsoft JhengHei"/>
                 <a:cs typeface="Microsoft JhengHei"/>
               </a:rPr>
-              <a:t>放學路上的</a:t>
+              <a:t>楊光梅好、</a:t>
             </a:r>
           </a:p>
           <a:p xmlns:a="http://schemas.openxmlformats.org/drawingml/2006/main">
@@ -4449,7 +4449,7 @@
                 <a:ea typeface="Microsoft JhengHei"/>
                 <a:cs typeface="Microsoft JhengHei"/>
               </a:rPr>
-              <a:t>安全選擇</a:t>
+              <a:t>安全第一</a:t>
             </a:r>
           </a:p>
         </p:txBody>
@@ -4459,7 +4459,7 @@
           <p:cNvPr id="3" name="">
             <a:extLst xmlns:a="http://schemas.openxmlformats.org/drawingml/2006/main">
               <a:ext uri="{FF2B5EF4-FFF2-40B4-BE49-F238E27FC236}">
-                <a16:creationId xmlns:a16="http://schemas.microsoft.com/office/drawing/2014/main" id="{2DEA63FE-71B6-42CC-B502-12751F7BE7CB}"/>
+                <a16:creationId xmlns:a16="http://schemas.microsoft.com/office/drawing/2014/main" id="{87196D6F-77F7-4E61-8079-A3289F5DC360}"/>
               </a:ext>
             </a:extLst>
           </p:cNvPr>
@@ -4470,8 +4470,8 @@
         </p:nvSpPr>
         <p:spPr>
           <a:xfrm xmlns:a="http://schemas.openxmlformats.org/drawingml/2006/main">
-            <a:off x="666750" y="4238625"/>
-            <a:ext cx="5715000" cy="1028700"/>
+            <a:off x="666750" y="4171950"/>
+            <a:ext cx="5810250" cy="1381125"/>
           </a:xfrm>
           <a:prstGeom xmlns:a="http://schemas.openxmlformats.org/drawingml/2006/main" prst="rect">
             <a:avLst/>
@@ -4487,7 +4487,7 @@
           </a:bodyPr>
           <a:lstStyle xmlns:a="http://schemas.openxmlformats.org/drawingml/2006/main">
             <a:defPPr>
-              <a:defRPr sz="2100" b="0">
+              <a:defRPr sz="1875" b="0">
                 <a:solidFill>
                   <a:srgbClr val="FFFFFF"/>
                 </a:solidFill>
@@ -4499,7 +4499,7 @@
           </a:lstStyle>
           <a:p xmlns:a="http://schemas.openxmlformats.org/drawingml/2006/main">
             <a:pPr>
-              <a:defRPr sz="2100" b="0">
+              <a:defRPr sz="1875" b="0">
                 <a:solidFill>
                   <a:srgbClr val="FFFFFF"/>
                 </a:solidFill>
@@ -4509,7 +4509,7 @@
               </a:defRPr>
             </a:pPr>
             <a:r>
-              <a:rPr sz="2100" b="0">
+              <a:rPr sz="1875" b="0">
                 <a:solidFill>
                   <a:srgbClr val="FFFFFF"/>
                 </a:solidFill>
@@ -4517,12 +4517,12 @@
                 <a:ea typeface="Microsoft JhengHei"/>
                 <a:cs typeface="Microsoft JhengHei"/>
               </a:rPr>
-              <a:t>楊梅高中交通安全充實課程</a:t>
+              <a:t>桃園市立楊梅高級中等學校</a:t>
             </a:r>
           </a:p>
           <a:p xmlns:a="http://schemas.openxmlformats.org/drawingml/2006/main">
             <a:pPr>
-              <a:defRPr sz="2100" b="0">
+              <a:defRPr sz="1875" b="0">
                 <a:solidFill>
                   <a:srgbClr val="FFFFFF"/>
                 </a:solidFill>
@@ -4532,7 +4532,7 @@
               </a:defRPr>
             </a:pPr>
             <a:r>
-              <a:rPr sz="2100" b="0">
+              <a:rPr sz="1875" b="0">
                 <a:solidFill>
                   <a:srgbClr val="FFFFFF"/>
                 </a:solidFill>
@@ -4540,7 +4540,30 @@
                 <a:ea typeface="Microsoft JhengHei"/>
                 <a:cs typeface="Microsoft JhengHei"/>
               </a:rPr>
-              <a:t>教師講授與個人練習</a:t>
+              <a:t>高二交通安全充實課程</a:t>
+            </a:r>
+          </a:p>
+          <a:p xmlns:a="http://schemas.openxmlformats.org/drawingml/2006/main">
+            <a:pPr>
+              <a:defRPr sz="1875" b="0">
+                <a:solidFill>
+                  <a:srgbClr val="FFFFFF"/>
+                </a:solidFill>
+                <a:latin typeface="Microsoft JhengHei"/>
+                <a:ea typeface="Microsoft JhengHei"/>
+                <a:cs typeface="Microsoft JhengHei"/>
+              </a:defRPr>
+            </a:pPr>
+            <a:r>
+              <a:rPr sz="1875" b="0">
+                <a:solidFill>
+                  <a:srgbClr val="FFFFFF"/>
+                </a:solidFill>
+                <a:latin typeface="Microsoft JhengHei"/>
+                <a:ea typeface="Microsoft JhengHei"/>
+                <a:cs typeface="Microsoft JhengHei"/>
+              </a:rPr>
+              <a:t>教師講授與個人練習版</a:t>
             </a:r>
           </a:p>
         </p:txBody>
@@ -4550,7 +4573,7 @@
           <p:cNvPr id="4" name="">
             <a:extLst xmlns:a="http://schemas.openxmlformats.org/drawingml/2006/main">
               <a:ext uri="{FF2B5EF4-FFF2-40B4-BE49-F238E27FC236}">
-                <a16:creationId xmlns:a16="http://schemas.microsoft.com/office/drawing/2014/main" id="{7622BE66-8D45-4C42-ADE1-BBFCA4C48C92}"/>
+                <a16:creationId xmlns:a16="http://schemas.microsoft.com/office/drawing/2014/main" id="{B03E4780-79D6-4D29-BA08-C6CCF391E485}"/>
               </a:ext>
             </a:extLst>
           </p:cNvPr>
@@ -4616,7 +4639,7 @@
     </p:spTree>
     <p:extLst>
       <p:ext uri="{BB962C8B-B14F-4D97-AF65-F5344CB8AC3E}">
-        <p14:creationId xmlns:p14="http://schemas.microsoft.com/office/powerpoint/2010/main" val="822132507"/>
+        <p14:creationId xmlns:p14="http://schemas.microsoft.com/office/powerpoint/2010/main" val="493375785"/>
       </p:ext>
     </p:extLst>
   </p:cSld>
@@ -4647,7 +4670,7 @@
           <p:cNvPr id="8" name="">
             <a:extLst xmlns:a="http://schemas.openxmlformats.org/drawingml/2006/main">
               <a:ext uri="{FF2B5EF4-FFF2-40B4-BE49-F238E27FC236}">
-                <a16:creationId xmlns:a16="http://schemas.microsoft.com/office/drawing/2014/main" id="{40C3B4C7-E340-41FF-A3F0-9D5E5379BC1B}"/>
+                <a16:creationId xmlns:a16="http://schemas.microsoft.com/office/drawing/2014/main" id="{BB625CA1-C569-4B55-8C59-FB8018DC14C8}"/>
               </a:ext>
             </a:extLst>
           </p:cNvPr>
@@ -4715,7 +4738,7 @@
           <p:cNvPr id="2" name="">
             <a:extLst xmlns:a="http://schemas.openxmlformats.org/drawingml/2006/main">
               <a:ext uri="{FF2B5EF4-FFF2-40B4-BE49-F238E27FC236}">
-                <a16:creationId xmlns:a16="http://schemas.microsoft.com/office/drawing/2014/main" id="{9C4CF3F2-06F6-45D1-8846-E7FFE66D0692}"/>
+                <a16:creationId xmlns:a16="http://schemas.microsoft.com/office/drawing/2014/main" id="{870C7466-1D87-473E-B1C7-745063DF543B}"/>
               </a:ext>
             </a:extLst>
           </p:cNvPr>
@@ -4783,7 +4806,7 @@
           <p:cNvPr id="3" name="">
             <a:extLst xmlns:a="http://schemas.openxmlformats.org/drawingml/2006/main">
               <a:ext uri="{FF2B5EF4-FFF2-40B4-BE49-F238E27FC236}">
-                <a16:creationId xmlns:a16="http://schemas.microsoft.com/office/drawing/2014/main" id="{1E23FB29-DFE3-4317-9AF5-22F779243061}"/>
+                <a16:creationId xmlns:a16="http://schemas.microsoft.com/office/drawing/2014/main" id="{8DCD7F87-978F-4288-BDFB-E5F7318AC3A9}"/>
               </a:ext>
             </a:extLst>
           </p:cNvPr>
@@ -4851,7 +4874,7 @@
           <p:cNvPr id="4" name="">
             <a:extLst xmlns:a="http://schemas.openxmlformats.org/drawingml/2006/main">
               <a:ext uri="{FF2B5EF4-FFF2-40B4-BE49-F238E27FC236}">
-                <a16:creationId xmlns:a16="http://schemas.microsoft.com/office/drawing/2014/main" id="{AC56A1CB-981F-4F5F-A93C-CCED8F337C31}"/>
+                <a16:creationId xmlns:a16="http://schemas.microsoft.com/office/drawing/2014/main" id="{F809AFCA-905D-4FE6-9EF7-071A83A91213}"/>
               </a:ext>
             </a:extLst>
           </p:cNvPr>
@@ -4919,7 +4942,7 @@
           <p:cNvPr id="5" name="">
             <a:extLst xmlns:a="http://schemas.openxmlformats.org/drawingml/2006/main">
               <a:ext uri="{FF2B5EF4-FFF2-40B4-BE49-F238E27FC236}">
-                <a16:creationId xmlns:a16="http://schemas.microsoft.com/office/drawing/2014/main" id="{00E1FBAA-A2CA-412B-A722-CBA5CBD42F7E}"/>
+                <a16:creationId xmlns:a16="http://schemas.microsoft.com/office/drawing/2014/main" id="{F293C955-7AA6-4F34-BBD1-5BC7502429EF}"/>
               </a:ext>
             </a:extLst>
           </p:cNvPr>
@@ -4987,7 +5010,7 @@
           <p:cNvPr id="6" name="">
             <a:extLst xmlns:a="http://schemas.openxmlformats.org/drawingml/2006/main">
               <a:ext uri="{FF2B5EF4-FFF2-40B4-BE49-F238E27FC236}">
-                <a16:creationId xmlns:a16="http://schemas.microsoft.com/office/drawing/2014/main" id="{F7D54654-D4A9-47E2-9731-282B6DF2FFF8}"/>
+                <a16:creationId xmlns:a16="http://schemas.microsoft.com/office/drawing/2014/main" id="{BCD0728F-546C-4B12-B56C-5A2D2A8F239E}"/>
               </a:ext>
             </a:extLst>
           </p:cNvPr>
@@ -5055,7 +5078,7 @@
           <p:cNvPr id="7" name="">
             <a:extLst xmlns:a="http://schemas.openxmlformats.org/drawingml/2006/main">
               <a:ext uri="{FF2B5EF4-FFF2-40B4-BE49-F238E27FC236}">
-                <a16:creationId xmlns:a16="http://schemas.microsoft.com/office/drawing/2014/main" id="{E5CF32B9-67E2-43D4-9B4C-0D23EBEA937E}"/>
+                <a16:creationId xmlns:a16="http://schemas.microsoft.com/office/drawing/2014/main" id="{32CD4971-1D9A-423E-8B42-56547DC9B8E9}"/>
               </a:ext>
             </a:extLst>
           </p:cNvPr>
@@ -5121,7 +5144,7 @@
     </p:spTree>
     <p:extLst>
       <p:ext uri="{BB962C8B-B14F-4D97-AF65-F5344CB8AC3E}">
-        <p14:creationId xmlns:p14="http://schemas.microsoft.com/office/powerpoint/2010/main" val="1416905844"/>
+        <p14:creationId xmlns:p14="http://schemas.microsoft.com/office/powerpoint/2010/main" val="1587830860"/>
       </p:ext>
     </p:extLst>
   </p:cSld>
@@ -5152,7 +5175,7 @@
           <p:cNvPr id="7" name="">
             <a:extLst xmlns:a="http://schemas.openxmlformats.org/drawingml/2006/main">
               <a:ext uri="{FF2B5EF4-FFF2-40B4-BE49-F238E27FC236}">
-                <a16:creationId xmlns:a16="http://schemas.microsoft.com/office/drawing/2014/main" id="{D033FC59-C239-4F7B-98C2-0A5598FA74DA}"/>
+                <a16:creationId xmlns:a16="http://schemas.microsoft.com/office/drawing/2014/main" id="{F10409FC-3DB9-4C74-A9B4-AEEE91A1C67B}"/>
               </a:ext>
             </a:extLst>
           </p:cNvPr>
@@ -5220,7 +5243,7 @@
           <p:cNvPr id="2" name="">
             <a:extLst xmlns:a="http://schemas.openxmlformats.org/drawingml/2006/main">
               <a:ext uri="{FF2B5EF4-FFF2-40B4-BE49-F238E27FC236}">
-                <a16:creationId xmlns:a16="http://schemas.microsoft.com/office/drawing/2014/main" id="{4A86DB89-C921-484F-A74E-61378CBDBDBE}"/>
+                <a16:creationId xmlns:a16="http://schemas.microsoft.com/office/drawing/2014/main" id="{87391BF6-86B7-49D6-A323-9DC5B9ECDC91}"/>
               </a:ext>
             </a:extLst>
           </p:cNvPr>
@@ -5288,7 +5311,7 @@
           <p:cNvPr id="3" name="">
             <a:extLst xmlns:a="http://schemas.openxmlformats.org/drawingml/2006/main">
               <a:ext uri="{FF2B5EF4-FFF2-40B4-BE49-F238E27FC236}">
-                <a16:creationId xmlns:a16="http://schemas.microsoft.com/office/drawing/2014/main" id="{F0DEC8E9-BA67-4BBE-A682-22A21AFBD2FA}"/>
+                <a16:creationId xmlns:a16="http://schemas.microsoft.com/office/drawing/2014/main" id="{27747601-4AF0-431B-8B68-AC8EBC9A6719}"/>
               </a:ext>
             </a:extLst>
           </p:cNvPr>
@@ -5356,7 +5379,7 @@
           <p:cNvPr id="4" name="">
             <a:extLst xmlns:a="http://schemas.openxmlformats.org/drawingml/2006/main">
               <a:ext uri="{FF2B5EF4-FFF2-40B4-BE49-F238E27FC236}">
-                <a16:creationId xmlns:a16="http://schemas.microsoft.com/office/drawing/2014/main" id="{18997124-DEE3-4FF0-B535-64AFA3A53B54}"/>
+                <a16:creationId xmlns:a16="http://schemas.microsoft.com/office/drawing/2014/main" id="{1574CBBA-B5FC-40FC-9A5C-20799D65D0E6}"/>
               </a:ext>
             </a:extLst>
           </p:cNvPr>
@@ -5424,7 +5447,7 @@
           <p:cNvPr id="5" name="">
             <a:extLst xmlns:a="http://schemas.openxmlformats.org/drawingml/2006/main">
               <a:ext uri="{FF2B5EF4-FFF2-40B4-BE49-F238E27FC236}">
-                <a16:creationId xmlns:a16="http://schemas.microsoft.com/office/drawing/2014/main" id="{129E70B1-11FA-4C61-9C77-34D936F572B2}"/>
+                <a16:creationId xmlns:a16="http://schemas.microsoft.com/office/drawing/2014/main" id="{49E7A17B-2CE0-4DCE-B0DC-B0C6ADBEE6E6}"/>
               </a:ext>
             </a:extLst>
           </p:cNvPr>
@@ -5492,7 +5515,7 @@
           <p:cNvPr id="6" name="">
             <a:extLst xmlns:a="http://schemas.openxmlformats.org/drawingml/2006/main">
               <a:ext uri="{FF2B5EF4-FFF2-40B4-BE49-F238E27FC236}">
-                <a16:creationId xmlns:a16="http://schemas.microsoft.com/office/drawing/2014/main" id="{369A3966-2970-421C-B6AE-AE5596798052}"/>
+                <a16:creationId xmlns:a16="http://schemas.microsoft.com/office/drawing/2014/main" id="{441D5661-66FF-4ECF-BD0A-C3784B12823D}"/>
               </a:ext>
             </a:extLst>
           </p:cNvPr>
@@ -5558,7 +5581,7 @@
     </p:spTree>
     <p:extLst>
       <p:ext uri="{BB962C8B-B14F-4D97-AF65-F5344CB8AC3E}">
-        <p14:creationId xmlns:p14="http://schemas.microsoft.com/office/powerpoint/2010/main" val="1951971953"/>
+        <p14:creationId xmlns:p14="http://schemas.microsoft.com/office/powerpoint/2010/main" val="601747794"/>
       </p:ext>
     </p:extLst>
   </p:cSld>
@@ -5589,7 +5612,7 @@
           <p:cNvPr id="6" name="">
             <a:extLst xmlns:a="http://schemas.openxmlformats.org/drawingml/2006/main">
               <a:ext uri="{FF2B5EF4-FFF2-40B4-BE49-F238E27FC236}">
-                <a16:creationId xmlns:a16="http://schemas.microsoft.com/office/drawing/2014/main" id="{6BF6D03C-FA40-48C9-82A4-BDBC42EFBFB4}"/>
+                <a16:creationId xmlns:a16="http://schemas.microsoft.com/office/drawing/2014/main" id="{D18B7394-4B60-43BF-8AA0-8DBD6A7585F5}"/>
               </a:ext>
             </a:extLst>
           </p:cNvPr>
@@ -5657,7 +5680,7 @@
           <p:cNvPr id="2" name="">
             <a:extLst xmlns:a="http://schemas.openxmlformats.org/drawingml/2006/main">
               <a:ext uri="{FF2B5EF4-FFF2-40B4-BE49-F238E27FC236}">
-                <a16:creationId xmlns:a16="http://schemas.microsoft.com/office/drawing/2014/main" id="{6868B7E0-E3EA-4512-8A2B-4F5D56A4DE8C}"/>
+                <a16:creationId xmlns:a16="http://schemas.microsoft.com/office/drawing/2014/main" id="{11DFE766-7923-444A-8DEE-159535E875A0}"/>
               </a:ext>
             </a:extLst>
           </p:cNvPr>
@@ -5725,7 +5748,7 @@
           <p:cNvPr id="3" name="">
             <a:extLst xmlns:a="http://schemas.openxmlformats.org/drawingml/2006/main">
               <a:ext uri="{FF2B5EF4-FFF2-40B4-BE49-F238E27FC236}">
-                <a16:creationId xmlns:a16="http://schemas.microsoft.com/office/drawing/2014/main" id="{FA220C54-2F78-487A-96D4-54006F1B1774}"/>
+                <a16:creationId xmlns:a16="http://schemas.microsoft.com/office/drawing/2014/main" id="{65B76077-E42F-4BA9-A55E-AE47E998CD7C}"/>
               </a:ext>
             </a:extLst>
           </p:cNvPr>
@@ -5793,7 +5816,7 @@
           <p:cNvPr id="4" name="">
             <a:extLst xmlns:a="http://schemas.openxmlformats.org/drawingml/2006/main">
               <a:ext uri="{FF2B5EF4-FFF2-40B4-BE49-F238E27FC236}">
-                <a16:creationId xmlns:a16="http://schemas.microsoft.com/office/drawing/2014/main" id="{D4C2F3CF-D879-4458-B79C-524BFFC07702}"/>
+                <a16:creationId xmlns:a16="http://schemas.microsoft.com/office/drawing/2014/main" id="{657EAC47-7061-4129-9543-8ACFB1854765}"/>
               </a:ext>
             </a:extLst>
           </p:cNvPr>
@@ -5850,7 +5873,7 @@
                 <a:latin typeface="Microsoft JhengHei"/>
                 <a:ea typeface="Microsoft JhengHei"/>
                 <a:cs typeface="Microsoft JhengHei"/>
-                <a:hlinkClick xmlns:r="http://schemas.openxmlformats.org/officeDocument/2006/relationships" r:id="R96d566eaef5d4e96"/>
+                <a:hlinkClick xmlns:r="http://schemas.openxmlformats.org/officeDocument/2006/relationships" r:id="Rf7656a4ed8e84c36"/>
               </a:rPr>
               <a:t>公視新聞網　2024.02.13</a:t>
             </a:r>
@@ -5874,7 +5897,7 @@
                 <a:latin typeface="Microsoft JhengHei"/>
                 <a:ea typeface="Microsoft JhengHei"/>
                 <a:cs typeface="Microsoft JhengHei"/>
-                <a:hlinkClick xmlns:r="http://schemas.openxmlformats.org/officeDocument/2006/relationships" r:id="R1a4aca81a33f4a8f"/>
+                <a:hlinkClick xmlns:r="http://schemas.openxmlformats.org/officeDocument/2006/relationships" r:id="Rc4fa4c1cac0e4735"/>
               </a:rPr>
               <a:t>點選觀看新聞片段</a:t>
             </a:r>
@@ -5886,7 +5909,7 @@
           <p:cNvPr id="5" name="">
             <a:extLst xmlns:a="http://schemas.openxmlformats.org/drawingml/2006/main">
               <a:ext uri="{FF2B5EF4-FFF2-40B4-BE49-F238E27FC236}">
-                <a16:creationId xmlns:a16="http://schemas.microsoft.com/office/drawing/2014/main" id="{4764F394-1D34-4ACD-934F-7C61586BFA98}"/>
+                <a16:creationId xmlns:a16="http://schemas.microsoft.com/office/drawing/2014/main" id="{EC73AB03-0224-4EFE-85AD-8A8CDC8D230F}"/>
               </a:ext>
             </a:extLst>
           </p:cNvPr>
@@ -5952,7 +5975,7 @@
     </p:spTree>
     <p:extLst>
       <p:ext uri="{BB962C8B-B14F-4D97-AF65-F5344CB8AC3E}">
-        <p14:creationId xmlns:p14="http://schemas.microsoft.com/office/powerpoint/2010/main" val="1982455211"/>
+        <p14:creationId xmlns:p14="http://schemas.microsoft.com/office/powerpoint/2010/main" val="881477011"/>
       </p:ext>
     </p:extLst>
   </p:cSld>
@@ -5983,7 +6006,7 @@
           <p:cNvPr id="7" name="">
             <a:extLst xmlns:a="http://schemas.openxmlformats.org/drawingml/2006/main">
               <a:ext uri="{FF2B5EF4-FFF2-40B4-BE49-F238E27FC236}">
-                <a16:creationId xmlns:a16="http://schemas.microsoft.com/office/drawing/2014/main" id="{78041EEB-F321-4F36-AD73-FE7F6F50BD70}"/>
+                <a16:creationId xmlns:a16="http://schemas.microsoft.com/office/drawing/2014/main" id="{4EF7377D-3D39-42CB-B8E5-64B5F5C7F56D}"/>
               </a:ext>
             </a:extLst>
           </p:cNvPr>
@@ -6051,7 +6074,7 @@
           <p:cNvPr id="2" name="">
             <a:extLst xmlns:a="http://schemas.openxmlformats.org/drawingml/2006/main">
               <a:ext uri="{FF2B5EF4-FFF2-40B4-BE49-F238E27FC236}">
-                <a16:creationId xmlns:a16="http://schemas.microsoft.com/office/drawing/2014/main" id="{16BD1C31-EA08-40B4-816D-24040C4998B6}"/>
+                <a16:creationId xmlns:a16="http://schemas.microsoft.com/office/drawing/2014/main" id="{E87AE88F-6E1C-4023-9FB9-93462C285CDF}"/>
               </a:ext>
             </a:extLst>
           </p:cNvPr>
@@ -6119,7 +6142,7 @@
           <p:cNvPr id="3" name="">
             <a:extLst xmlns:a="http://schemas.openxmlformats.org/drawingml/2006/main">
               <a:ext uri="{FF2B5EF4-FFF2-40B4-BE49-F238E27FC236}">
-                <a16:creationId xmlns:a16="http://schemas.microsoft.com/office/drawing/2014/main" id="{BBA5D6CA-2E3B-4C6F-AE00-412F7E66A78D}"/>
+                <a16:creationId xmlns:a16="http://schemas.microsoft.com/office/drawing/2014/main" id="{ACADC1F5-0872-4D19-9BB3-AC730C243810}"/>
               </a:ext>
             </a:extLst>
           </p:cNvPr>
@@ -6187,7 +6210,7 @@
           <p:cNvPr id="4" name="">
             <a:extLst xmlns:a="http://schemas.openxmlformats.org/drawingml/2006/main">
               <a:ext uri="{FF2B5EF4-FFF2-40B4-BE49-F238E27FC236}">
-                <a16:creationId xmlns:a16="http://schemas.microsoft.com/office/drawing/2014/main" id="{B5A95E3A-9814-424C-8855-47A7B1DFCD13}"/>
+                <a16:creationId xmlns:a16="http://schemas.microsoft.com/office/drawing/2014/main" id="{A1A6EEDE-EA65-49DB-A495-714E84B1F644}"/>
               </a:ext>
             </a:extLst>
           </p:cNvPr>
@@ -6255,7 +6278,7 @@
           <p:cNvPr id="5" name="">
             <a:extLst xmlns:a="http://schemas.openxmlformats.org/drawingml/2006/main">
               <a:ext uri="{FF2B5EF4-FFF2-40B4-BE49-F238E27FC236}">
-                <a16:creationId xmlns:a16="http://schemas.microsoft.com/office/drawing/2014/main" id="{2092B7C1-3EBB-4B1D-9615-52CA22AAEDB7}"/>
+                <a16:creationId xmlns:a16="http://schemas.microsoft.com/office/drawing/2014/main" id="{D9B64C48-3796-4B2E-84C5-C64EF78C83AF}"/>
               </a:ext>
             </a:extLst>
           </p:cNvPr>
@@ -6323,7 +6346,7 @@
           <p:cNvPr id="6" name="">
             <a:extLst xmlns:a="http://schemas.openxmlformats.org/drawingml/2006/main">
               <a:ext uri="{FF2B5EF4-FFF2-40B4-BE49-F238E27FC236}">
-                <a16:creationId xmlns:a16="http://schemas.microsoft.com/office/drawing/2014/main" id="{0DE00580-6CFE-4977-8D71-8CEEB7E6A360}"/>
+                <a16:creationId xmlns:a16="http://schemas.microsoft.com/office/drawing/2014/main" id="{A465F75C-9DD7-4617-BA7C-61E67A8810CD}"/>
               </a:ext>
             </a:extLst>
           </p:cNvPr>
@@ -6389,7 +6412,7 @@
     </p:spTree>
     <p:extLst>
       <p:ext uri="{BB962C8B-B14F-4D97-AF65-F5344CB8AC3E}">
-        <p14:creationId xmlns:p14="http://schemas.microsoft.com/office/powerpoint/2010/main" val="1540161202"/>
+        <p14:creationId xmlns:p14="http://schemas.microsoft.com/office/powerpoint/2010/main" val="1262933175"/>
       </p:ext>
     </p:extLst>
   </p:cSld>
@@ -6420,7 +6443,7 @@
           <p:cNvPr id="7" name="">
             <a:extLst xmlns:a="http://schemas.openxmlformats.org/drawingml/2006/main">
               <a:ext uri="{FF2B5EF4-FFF2-40B4-BE49-F238E27FC236}">
-                <a16:creationId xmlns:a16="http://schemas.microsoft.com/office/drawing/2014/main" id="{D9BE07AF-316B-474C-9A0C-DDE48A659B5A}"/>
+                <a16:creationId xmlns:a16="http://schemas.microsoft.com/office/drawing/2014/main" id="{A87904DC-6B61-4A59-AC94-6EC609B35867}"/>
               </a:ext>
             </a:extLst>
           </p:cNvPr>
@@ -6488,7 +6511,7 @@
           <p:cNvPr id="2" name="">
             <a:extLst xmlns:a="http://schemas.openxmlformats.org/drawingml/2006/main">
               <a:ext uri="{FF2B5EF4-FFF2-40B4-BE49-F238E27FC236}">
-                <a16:creationId xmlns:a16="http://schemas.microsoft.com/office/drawing/2014/main" id="{AE186D0D-19D9-4887-8C89-A3BB680E10BF}"/>
+                <a16:creationId xmlns:a16="http://schemas.microsoft.com/office/drawing/2014/main" id="{437C6EE6-0B87-4E85-938C-F3B308AA0081}"/>
               </a:ext>
             </a:extLst>
           </p:cNvPr>
@@ -6556,7 +6579,7 @@
           <p:cNvPr id="3" name="">
             <a:extLst xmlns:a="http://schemas.openxmlformats.org/drawingml/2006/main">
               <a:ext uri="{FF2B5EF4-FFF2-40B4-BE49-F238E27FC236}">
-                <a16:creationId xmlns:a16="http://schemas.microsoft.com/office/drawing/2014/main" id="{2F21AE3F-0F95-45E0-820B-3C1B035B032D}"/>
+                <a16:creationId xmlns:a16="http://schemas.microsoft.com/office/drawing/2014/main" id="{47CB26C5-6509-4E59-A794-31AFDE8CD0E4}"/>
               </a:ext>
             </a:extLst>
           </p:cNvPr>
@@ -6624,7 +6647,7 @@
           <p:cNvPr id="4" name="">
             <a:extLst xmlns:a="http://schemas.openxmlformats.org/drawingml/2006/main">
               <a:ext uri="{FF2B5EF4-FFF2-40B4-BE49-F238E27FC236}">
-                <a16:creationId xmlns:a16="http://schemas.microsoft.com/office/drawing/2014/main" id="{7C2E5091-FE13-4263-AB4A-A563D28A0AEE}"/>
+                <a16:creationId xmlns:a16="http://schemas.microsoft.com/office/drawing/2014/main" id="{FDBF7368-232F-44A9-84CB-D5393F26F0A6}"/>
               </a:ext>
             </a:extLst>
           </p:cNvPr>
@@ -6692,7 +6715,7 @@
           <p:cNvPr id="5" name="">
             <a:extLst xmlns:a="http://schemas.openxmlformats.org/drawingml/2006/main">
               <a:ext uri="{FF2B5EF4-FFF2-40B4-BE49-F238E27FC236}">
-                <a16:creationId xmlns:a16="http://schemas.microsoft.com/office/drawing/2014/main" id="{F2037BF2-2C31-4051-91C6-DBEE0A5212BE}"/>
+                <a16:creationId xmlns:a16="http://schemas.microsoft.com/office/drawing/2014/main" id="{5F95B28B-9630-45CD-B11D-D4366112C7CF}"/>
               </a:ext>
             </a:extLst>
           </p:cNvPr>
@@ -6760,7 +6783,7 @@
           <p:cNvPr id="6" name="">
             <a:extLst xmlns:a="http://schemas.openxmlformats.org/drawingml/2006/main">
               <a:ext uri="{FF2B5EF4-FFF2-40B4-BE49-F238E27FC236}">
-                <a16:creationId xmlns:a16="http://schemas.microsoft.com/office/drawing/2014/main" id="{31C8C20E-371E-488B-8568-F0FF233D607F}"/>
+                <a16:creationId xmlns:a16="http://schemas.microsoft.com/office/drawing/2014/main" id="{2D0ED6E0-1DFF-49F5-A3BB-F6D14E6E24C8}"/>
               </a:ext>
             </a:extLst>
           </p:cNvPr>
@@ -6826,7 +6849,7 @@
     </p:spTree>
     <p:extLst>
       <p:ext uri="{BB962C8B-B14F-4D97-AF65-F5344CB8AC3E}">
-        <p14:creationId xmlns:p14="http://schemas.microsoft.com/office/powerpoint/2010/main" val="744726274"/>
+        <p14:creationId xmlns:p14="http://schemas.microsoft.com/office/powerpoint/2010/main" val="1081221758"/>
       </p:ext>
     </p:extLst>
   </p:cSld>
@@ -6857,7 +6880,7 @@
           <p:cNvPr id="8" name="">
             <a:extLst xmlns:a="http://schemas.openxmlformats.org/drawingml/2006/main">
               <a:ext uri="{FF2B5EF4-FFF2-40B4-BE49-F238E27FC236}">
-                <a16:creationId xmlns:a16="http://schemas.microsoft.com/office/drawing/2014/main" id="{0275826C-84D4-4FC7-A158-941E9676F531}"/>
+                <a16:creationId xmlns:a16="http://schemas.microsoft.com/office/drawing/2014/main" id="{ABF9772B-D922-4776-A110-DABD6949226E}"/>
               </a:ext>
             </a:extLst>
           </p:cNvPr>
@@ -6925,7 +6948,7 @@
           <p:cNvPr id="2" name="">
             <a:extLst xmlns:a="http://schemas.openxmlformats.org/drawingml/2006/main">
               <a:ext uri="{FF2B5EF4-FFF2-40B4-BE49-F238E27FC236}">
-                <a16:creationId xmlns:a16="http://schemas.microsoft.com/office/drawing/2014/main" id="{81465198-D10E-4515-B32A-82EBD6B375A5}"/>
+                <a16:creationId xmlns:a16="http://schemas.microsoft.com/office/drawing/2014/main" id="{8A340376-892F-4D97-BF5D-6EF01823B050}"/>
               </a:ext>
             </a:extLst>
           </p:cNvPr>
@@ -6993,7 +7016,7 @@
           <p:cNvPr id="3" name="">
             <a:extLst xmlns:a="http://schemas.openxmlformats.org/drawingml/2006/main">
               <a:ext uri="{FF2B5EF4-FFF2-40B4-BE49-F238E27FC236}">
-                <a16:creationId xmlns:a16="http://schemas.microsoft.com/office/drawing/2014/main" id="{6D4B14DB-0401-4236-8554-781D3A1DA755}"/>
+                <a16:creationId xmlns:a16="http://schemas.microsoft.com/office/drawing/2014/main" id="{2C3B1DE9-8DC9-4FA6-95E8-D73AB12A8128}"/>
               </a:ext>
             </a:extLst>
           </p:cNvPr>
@@ -7061,7 +7084,7 @@
           <p:cNvPr id="4" name="">
             <a:extLst xmlns:a="http://schemas.openxmlformats.org/drawingml/2006/main">
               <a:ext uri="{FF2B5EF4-FFF2-40B4-BE49-F238E27FC236}">
-                <a16:creationId xmlns:a16="http://schemas.microsoft.com/office/drawing/2014/main" id="{92675E2C-7EA5-416F-BA9C-6F67884E780F}"/>
+                <a16:creationId xmlns:a16="http://schemas.microsoft.com/office/drawing/2014/main" id="{4D2FBF87-472A-4323-9DD7-E51AA7AFB00F}"/>
               </a:ext>
             </a:extLst>
           </p:cNvPr>
@@ -7129,7 +7152,7 @@
           <p:cNvPr id="5" name="">
             <a:extLst xmlns:a="http://schemas.openxmlformats.org/drawingml/2006/main">
               <a:ext uri="{FF2B5EF4-FFF2-40B4-BE49-F238E27FC236}">
-                <a16:creationId xmlns:a16="http://schemas.microsoft.com/office/drawing/2014/main" id="{E8D2246D-829C-4B21-9EED-CE7A01E27F2B}"/>
+                <a16:creationId xmlns:a16="http://schemas.microsoft.com/office/drawing/2014/main" id="{028146BE-0229-4F5C-8E7B-5361E055B512}"/>
               </a:ext>
             </a:extLst>
           </p:cNvPr>
@@ -7197,7 +7220,7 @@
           <p:cNvPr id="6" name="">
             <a:extLst xmlns:a="http://schemas.openxmlformats.org/drawingml/2006/main">
               <a:ext uri="{FF2B5EF4-FFF2-40B4-BE49-F238E27FC236}">
-                <a16:creationId xmlns:a16="http://schemas.microsoft.com/office/drawing/2014/main" id="{76E03B0C-6566-4BC8-B4BE-E4F870593D4D}"/>
+                <a16:creationId xmlns:a16="http://schemas.microsoft.com/office/drawing/2014/main" id="{4DC2406D-EB2C-4708-B6E4-62C351484903}"/>
               </a:ext>
             </a:extLst>
           </p:cNvPr>
@@ -7265,7 +7288,7 @@
           <p:cNvPr id="7" name="">
             <a:extLst xmlns:a="http://schemas.openxmlformats.org/drawingml/2006/main">
               <a:ext uri="{FF2B5EF4-FFF2-40B4-BE49-F238E27FC236}">
-                <a16:creationId xmlns:a16="http://schemas.microsoft.com/office/drawing/2014/main" id="{7F422C0A-B781-494D-8E02-52C020F744D7}"/>
+                <a16:creationId xmlns:a16="http://schemas.microsoft.com/office/drawing/2014/main" id="{5C1C66CA-26B2-48FF-9E1B-6C5D7C4D395A}"/>
               </a:ext>
             </a:extLst>
           </p:cNvPr>
@@ -7331,7 +7354,7 @@
     </p:spTree>
     <p:extLst>
       <p:ext uri="{BB962C8B-B14F-4D97-AF65-F5344CB8AC3E}">
-        <p14:creationId xmlns:p14="http://schemas.microsoft.com/office/powerpoint/2010/main" val="1908236299"/>
+        <p14:creationId xmlns:p14="http://schemas.microsoft.com/office/powerpoint/2010/main" val="304333618"/>
       </p:ext>
     </p:extLst>
   </p:cSld>
@@ -7362,7 +7385,7 @@
           <p:cNvPr id="8" name="">
             <a:extLst xmlns:a="http://schemas.openxmlformats.org/drawingml/2006/main">
               <a:ext uri="{FF2B5EF4-FFF2-40B4-BE49-F238E27FC236}">
-                <a16:creationId xmlns:a16="http://schemas.microsoft.com/office/drawing/2014/main" id="{A9C605B4-A5D9-4324-9D0C-C8C4DB0A5F41}"/>
+                <a16:creationId xmlns:a16="http://schemas.microsoft.com/office/drawing/2014/main" id="{EEC98303-2606-4BFE-893C-2DC52B95F4D0}"/>
               </a:ext>
             </a:extLst>
           </p:cNvPr>
@@ -7430,7 +7453,7 @@
           <p:cNvPr id="2" name="">
             <a:extLst xmlns:a="http://schemas.openxmlformats.org/drawingml/2006/main">
               <a:ext uri="{FF2B5EF4-FFF2-40B4-BE49-F238E27FC236}">
-                <a16:creationId xmlns:a16="http://schemas.microsoft.com/office/drawing/2014/main" id="{EE2B52F2-EA75-4DFC-919C-02A5B425140A}"/>
+                <a16:creationId xmlns:a16="http://schemas.microsoft.com/office/drawing/2014/main" id="{C0A2938E-AAF2-468F-B4E1-0C8869A84E06}"/>
               </a:ext>
             </a:extLst>
           </p:cNvPr>
@@ -7498,7 +7521,7 @@
           <p:cNvPr id="3" name="">
             <a:extLst xmlns:a="http://schemas.openxmlformats.org/drawingml/2006/main">
               <a:ext uri="{FF2B5EF4-FFF2-40B4-BE49-F238E27FC236}">
-                <a16:creationId xmlns:a16="http://schemas.microsoft.com/office/drawing/2014/main" id="{BE957959-880F-4D38-B80E-28BAA6D7F225}"/>
+                <a16:creationId xmlns:a16="http://schemas.microsoft.com/office/drawing/2014/main" id="{BCCDA49D-5D9C-4E0C-9224-57799A3AD5AF}"/>
               </a:ext>
             </a:extLst>
           </p:cNvPr>
@@ -7566,7 +7589,7 @@
           <p:cNvPr id="4" name="">
             <a:extLst xmlns:a="http://schemas.openxmlformats.org/drawingml/2006/main">
               <a:ext uri="{FF2B5EF4-FFF2-40B4-BE49-F238E27FC236}">
-                <a16:creationId xmlns:a16="http://schemas.microsoft.com/office/drawing/2014/main" id="{08295E70-2838-4756-AB46-6D888BE71F93}"/>
+                <a16:creationId xmlns:a16="http://schemas.microsoft.com/office/drawing/2014/main" id="{41F6DBD3-27A7-41FE-9F0C-4EAD29EFB6E2}"/>
               </a:ext>
             </a:extLst>
           </p:cNvPr>
@@ -7634,7 +7657,7 @@
           <p:cNvPr id="5" name="">
             <a:extLst xmlns:a="http://schemas.openxmlformats.org/drawingml/2006/main">
               <a:ext uri="{FF2B5EF4-FFF2-40B4-BE49-F238E27FC236}">
-                <a16:creationId xmlns:a16="http://schemas.microsoft.com/office/drawing/2014/main" id="{968D384B-C7EB-42CF-AA29-303474A632B8}"/>
+                <a16:creationId xmlns:a16="http://schemas.microsoft.com/office/drawing/2014/main" id="{DBFEFC24-6EE4-404A-AF2F-40D8F8AA6C57}"/>
               </a:ext>
             </a:extLst>
           </p:cNvPr>
@@ -7702,7 +7725,7 @@
           <p:cNvPr id="6" name="">
             <a:extLst xmlns:a="http://schemas.openxmlformats.org/drawingml/2006/main">
               <a:ext uri="{FF2B5EF4-FFF2-40B4-BE49-F238E27FC236}">
-                <a16:creationId xmlns:a16="http://schemas.microsoft.com/office/drawing/2014/main" id="{4146B9E7-8A85-409D-B5DC-364CB67575CF}"/>
+                <a16:creationId xmlns:a16="http://schemas.microsoft.com/office/drawing/2014/main" id="{511C214C-762E-47B0-BA17-91CDC7197450}"/>
               </a:ext>
             </a:extLst>
           </p:cNvPr>
@@ -7770,7 +7793,7 @@
           <p:cNvPr id="7" name="">
             <a:extLst xmlns:a="http://schemas.openxmlformats.org/drawingml/2006/main">
               <a:ext uri="{FF2B5EF4-FFF2-40B4-BE49-F238E27FC236}">
-                <a16:creationId xmlns:a16="http://schemas.microsoft.com/office/drawing/2014/main" id="{9234AA9B-9AF7-4DE4-9A6A-37EAE0DF5B86}"/>
+                <a16:creationId xmlns:a16="http://schemas.microsoft.com/office/drawing/2014/main" id="{73E210A8-1579-444A-86FA-D968A2B94024}"/>
               </a:ext>
             </a:extLst>
           </p:cNvPr>
@@ -7836,7 +7859,7 @@
     </p:spTree>
     <p:extLst>
       <p:ext uri="{BB962C8B-B14F-4D97-AF65-F5344CB8AC3E}">
-        <p14:creationId xmlns:p14="http://schemas.microsoft.com/office/powerpoint/2010/main" val="315214561"/>
+        <p14:creationId xmlns:p14="http://schemas.microsoft.com/office/powerpoint/2010/main" val="593527891"/>
       </p:ext>
     </p:extLst>
   </p:cSld>
@@ -7867,7 +7890,7 @@
           <p:cNvPr id="8" name="">
             <a:extLst xmlns:a="http://schemas.openxmlformats.org/drawingml/2006/main">
               <a:ext uri="{FF2B5EF4-FFF2-40B4-BE49-F238E27FC236}">
-                <a16:creationId xmlns:a16="http://schemas.microsoft.com/office/drawing/2014/main" id="{E769A2D3-AFCE-4653-AFE1-8A5D0C9D7898}"/>
+                <a16:creationId xmlns:a16="http://schemas.microsoft.com/office/drawing/2014/main" id="{1AB9EC76-9B13-4E3E-A87F-875F7A8EC5B2}"/>
               </a:ext>
             </a:extLst>
           </p:cNvPr>
@@ -7935,7 +7958,7 @@
           <p:cNvPr id="2" name="">
             <a:extLst xmlns:a="http://schemas.openxmlformats.org/drawingml/2006/main">
               <a:ext uri="{FF2B5EF4-FFF2-40B4-BE49-F238E27FC236}">
-                <a16:creationId xmlns:a16="http://schemas.microsoft.com/office/drawing/2014/main" id="{8B84BCAF-1EFE-4086-8F47-00454AC6ED1D}"/>
+                <a16:creationId xmlns:a16="http://schemas.microsoft.com/office/drawing/2014/main" id="{00EC035B-6888-4AD8-97D0-2CAB97BE18B1}"/>
               </a:ext>
             </a:extLst>
           </p:cNvPr>
@@ -8003,7 +8026,7 @@
           <p:cNvPr id="3" name="">
             <a:extLst xmlns:a="http://schemas.openxmlformats.org/drawingml/2006/main">
               <a:ext uri="{FF2B5EF4-FFF2-40B4-BE49-F238E27FC236}">
-                <a16:creationId xmlns:a16="http://schemas.microsoft.com/office/drawing/2014/main" id="{7E69FF36-59F9-442B-B0EA-83F1AE79311D}"/>
+                <a16:creationId xmlns:a16="http://schemas.microsoft.com/office/drawing/2014/main" id="{1DBB5082-15C2-411D-972C-B159748E71EA}"/>
               </a:ext>
             </a:extLst>
           </p:cNvPr>
@@ -8071,7 +8094,7 @@
           <p:cNvPr id="4" name="">
             <a:extLst xmlns:a="http://schemas.openxmlformats.org/drawingml/2006/main">
               <a:ext uri="{FF2B5EF4-FFF2-40B4-BE49-F238E27FC236}">
-                <a16:creationId xmlns:a16="http://schemas.microsoft.com/office/drawing/2014/main" id="{A0F0DCD3-B543-4C33-969D-A8A8C9A6C2BF}"/>
+                <a16:creationId xmlns:a16="http://schemas.microsoft.com/office/drawing/2014/main" id="{433C886B-CEFB-4A7E-892A-0B92D79E5232}"/>
               </a:ext>
             </a:extLst>
           </p:cNvPr>
@@ -8139,7 +8162,7 @@
           <p:cNvPr id="5" name="">
             <a:extLst xmlns:a="http://schemas.openxmlformats.org/drawingml/2006/main">
               <a:ext uri="{FF2B5EF4-FFF2-40B4-BE49-F238E27FC236}">
-                <a16:creationId xmlns:a16="http://schemas.microsoft.com/office/drawing/2014/main" id="{638B63F0-80FB-4784-AB8F-5252034CFC83}"/>
+                <a16:creationId xmlns:a16="http://schemas.microsoft.com/office/drawing/2014/main" id="{BCDA9B7E-5D4B-43B2-9A9A-E8FF268CC332}"/>
               </a:ext>
             </a:extLst>
           </p:cNvPr>
@@ -8207,7 +8230,7 @@
           <p:cNvPr id="6" name="">
             <a:extLst xmlns:a="http://schemas.openxmlformats.org/drawingml/2006/main">
               <a:ext uri="{FF2B5EF4-FFF2-40B4-BE49-F238E27FC236}">
-                <a16:creationId xmlns:a16="http://schemas.microsoft.com/office/drawing/2014/main" id="{884428C8-E60D-4532-9451-DA91ECFEFD78}"/>
+                <a16:creationId xmlns:a16="http://schemas.microsoft.com/office/drawing/2014/main" id="{52C3C851-7AD2-4835-B2E2-FFC077C30508}"/>
               </a:ext>
             </a:extLst>
           </p:cNvPr>
@@ -8275,7 +8298,7 @@
           <p:cNvPr id="7" name="">
             <a:extLst xmlns:a="http://schemas.openxmlformats.org/drawingml/2006/main">
               <a:ext uri="{FF2B5EF4-FFF2-40B4-BE49-F238E27FC236}">
-                <a16:creationId xmlns:a16="http://schemas.microsoft.com/office/drawing/2014/main" id="{2F315218-884B-4452-8675-31174D6A18D9}"/>
+                <a16:creationId xmlns:a16="http://schemas.microsoft.com/office/drawing/2014/main" id="{F02079AB-609E-4114-9EE6-FB76D49DE008}"/>
               </a:ext>
             </a:extLst>
           </p:cNvPr>
@@ -8341,7 +8364,7 @@
     </p:spTree>
     <p:extLst>
       <p:ext uri="{BB962C8B-B14F-4D97-AF65-F5344CB8AC3E}">
-        <p14:creationId xmlns:p14="http://schemas.microsoft.com/office/powerpoint/2010/main" val="1941385281"/>
+        <p14:creationId xmlns:p14="http://schemas.microsoft.com/office/powerpoint/2010/main" val="903115719"/>
       </p:ext>
     </p:extLst>
   </p:cSld>
@@ -8372,7 +8395,7 @@
           <p:cNvPr id="7" name="">
             <a:extLst xmlns:a="http://schemas.openxmlformats.org/drawingml/2006/main">
               <a:ext uri="{FF2B5EF4-FFF2-40B4-BE49-F238E27FC236}">
-                <a16:creationId xmlns:a16="http://schemas.microsoft.com/office/drawing/2014/main" id="{FE9E9D36-15AC-4F76-BE38-7696B6A09245}"/>
+                <a16:creationId xmlns:a16="http://schemas.microsoft.com/office/drawing/2014/main" id="{78B6DAA2-7EAE-4318-91D8-9F0D4DADAF6C}"/>
               </a:ext>
             </a:extLst>
           </p:cNvPr>
@@ -8440,7 +8463,7 @@
           <p:cNvPr id="2" name="">
             <a:extLst xmlns:a="http://schemas.openxmlformats.org/drawingml/2006/main">
               <a:ext uri="{FF2B5EF4-FFF2-40B4-BE49-F238E27FC236}">
-                <a16:creationId xmlns:a16="http://schemas.microsoft.com/office/drawing/2014/main" id="{DAF23028-8416-4371-8F60-3CDEDDE2BAD2}"/>
+                <a16:creationId xmlns:a16="http://schemas.microsoft.com/office/drawing/2014/main" id="{78388AA2-976C-4B20-AED3-9D37AE269025}"/>
               </a:ext>
             </a:extLst>
           </p:cNvPr>
@@ -8508,7 +8531,7 @@
           <p:cNvPr id="3" name="">
             <a:extLst xmlns:a="http://schemas.openxmlformats.org/drawingml/2006/main">
               <a:ext uri="{FF2B5EF4-FFF2-40B4-BE49-F238E27FC236}">
-                <a16:creationId xmlns:a16="http://schemas.microsoft.com/office/drawing/2014/main" id="{F771AEDA-1CBB-4F6B-BBD1-B1299B40477D}"/>
+                <a16:creationId xmlns:a16="http://schemas.microsoft.com/office/drawing/2014/main" id="{9DDB6840-B366-48D5-B0DC-91573E2A0EF5}"/>
               </a:ext>
             </a:extLst>
           </p:cNvPr>
@@ -8576,7 +8599,7 @@
           <p:cNvPr id="4" name="">
             <a:extLst xmlns:a="http://schemas.openxmlformats.org/drawingml/2006/main">
               <a:ext uri="{FF2B5EF4-FFF2-40B4-BE49-F238E27FC236}">
-                <a16:creationId xmlns:a16="http://schemas.microsoft.com/office/drawing/2014/main" id="{827FA026-1734-48EC-AE49-3D6CBCC92EA4}"/>
+                <a16:creationId xmlns:a16="http://schemas.microsoft.com/office/drawing/2014/main" id="{959AD702-9BE1-4ACF-94AE-2338F9A0F3EF}"/>
               </a:ext>
             </a:extLst>
           </p:cNvPr>
@@ -8644,7 +8667,7 @@
           <p:cNvPr id="5" name="">
             <a:extLst xmlns:a="http://schemas.openxmlformats.org/drawingml/2006/main">
               <a:ext uri="{FF2B5EF4-FFF2-40B4-BE49-F238E27FC236}">
-                <a16:creationId xmlns:a16="http://schemas.microsoft.com/office/drawing/2014/main" id="{8DDE361C-6467-45FC-9E21-DC54D193EB36}"/>
+                <a16:creationId xmlns:a16="http://schemas.microsoft.com/office/drawing/2014/main" id="{F69260B8-4DF5-4656-8071-353A4E4A3084}"/>
               </a:ext>
             </a:extLst>
           </p:cNvPr>
@@ -8712,7 +8735,7 @@
           <p:cNvPr id="6" name="">
             <a:extLst xmlns:a="http://schemas.openxmlformats.org/drawingml/2006/main">
               <a:ext uri="{FF2B5EF4-FFF2-40B4-BE49-F238E27FC236}">
-                <a16:creationId xmlns:a16="http://schemas.microsoft.com/office/drawing/2014/main" id="{0F8EEC89-4A4B-4B84-A1CA-5842F5C6736A}"/>
+                <a16:creationId xmlns:a16="http://schemas.microsoft.com/office/drawing/2014/main" id="{5ADF2AF3-3B81-4377-8DE8-4F6682EB16C5}"/>
               </a:ext>
             </a:extLst>
           </p:cNvPr>
@@ -8778,7 +8801,7 @@
     </p:spTree>
     <p:extLst>
       <p:ext uri="{BB962C8B-B14F-4D97-AF65-F5344CB8AC3E}">
-        <p14:creationId xmlns:p14="http://schemas.microsoft.com/office/powerpoint/2010/main" val="1217042515"/>
+        <p14:creationId xmlns:p14="http://schemas.microsoft.com/office/powerpoint/2010/main" val="824083022"/>
       </p:ext>
     </p:extLst>
   </p:cSld>
@@ -8809,7 +8832,7 @@
           <p:cNvPr id="9" name="">
             <a:extLst xmlns:a="http://schemas.openxmlformats.org/drawingml/2006/main">
               <a:ext uri="{FF2B5EF4-FFF2-40B4-BE49-F238E27FC236}">
-                <a16:creationId xmlns:a16="http://schemas.microsoft.com/office/drawing/2014/main" id="{8DD32D32-6344-4E66-9154-9E231860D5CF}"/>
+                <a16:creationId xmlns:a16="http://schemas.microsoft.com/office/drawing/2014/main" id="{BD1D0B17-6ABB-4AE7-A273-C491A9DCF83D}"/>
               </a:ext>
             </a:extLst>
           </p:cNvPr>
@@ -8877,7 +8900,7 @@
           <p:cNvPr id="2" name="">
             <a:extLst xmlns:a="http://schemas.openxmlformats.org/drawingml/2006/main">
               <a:ext uri="{FF2B5EF4-FFF2-40B4-BE49-F238E27FC236}">
-                <a16:creationId xmlns:a16="http://schemas.microsoft.com/office/drawing/2014/main" id="{327445A8-8F34-4779-92C9-AA639432B54D}"/>
+                <a16:creationId xmlns:a16="http://schemas.microsoft.com/office/drawing/2014/main" id="{E5785BC1-5AAA-4AA1-A720-CC5A9124BE3C}"/>
               </a:ext>
             </a:extLst>
           </p:cNvPr>
@@ -8945,7 +8968,7 @@
           <p:cNvPr id="3" name="">
             <a:extLst xmlns:a="http://schemas.openxmlformats.org/drawingml/2006/main">
               <a:ext uri="{FF2B5EF4-FFF2-40B4-BE49-F238E27FC236}">
-                <a16:creationId xmlns:a16="http://schemas.microsoft.com/office/drawing/2014/main" id="{2FE24D72-04E0-4DA9-865F-A86689F9BE04}"/>
+                <a16:creationId xmlns:a16="http://schemas.microsoft.com/office/drawing/2014/main" id="{72315401-012B-4097-82F3-ED8A4C90C33A}"/>
               </a:ext>
             </a:extLst>
           </p:cNvPr>
@@ -9013,7 +9036,7 @@
           <p:cNvPr id="4" name="">
             <a:extLst xmlns:a="http://schemas.openxmlformats.org/drawingml/2006/main">
               <a:ext uri="{FF2B5EF4-FFF2-40B4-BE49-F238E27FC236}">
-                <a16:creationId xmlns:a16="http://schemas.microsoft.com/office/drawing/2014/main" id="{EF0B48C7-1711-4DC5-9FC3-6CE638AF8A31}"/>
+                <a16:creationId xmlns:a16="http://schemas.microsoft.com/office/drawing/2014/main" id="{6CBCB3CB-94AA-4613-B777-C5B95238DA1F}"/>
               </a:ext>
             </a:extLst>
           </p:cNvPr>
@@ -9081,7 +9104,7 @@
           <p:cNvPr id="5" name="">
             <a:extLst xmlns:a="http://schemas.openxmlformats.org/drawingml/2006/main">
               <a:ext uri="{FF2B5EF4-FFF2-40B4-BE49-F238E27FC236}">
-                <a16:creationId xmlns:a16="http://schemas.microsoft.com/office/drawing/2014/main" id="{FBEDCAC7-31A0-4C54-8174-3802AD21E1CD}"/>
+                <a16:creationId xmlns:a16="http://schemas.microsoft.com/office/drawing/2014/main" id="{239429C4-AB21-43C3-B23D-51BF82F0748B}"/>
               </a:ext>
             </a:extLst>
           </p:cNvPr>
@@ -9149,7 +9172,7 @@
           <p:cNvPr id="6" name="">
             <a:extLst xmlns:a="http://schemas.openxmlformats.org/drawingml/2006/main">
               <a:ext uri="{FF2B5EF4-FFF2-40B4-BE49-F238E27FC236}">
-                <a16:creationId xmlns:a16="http://schemas.microsoft.com/office/drawing/2014/main" id="{912A750A-DE1C-44BC-93E6-E4C7FFBF1557}"/>
+                <a16:creationId xmlns:a16="http://schemas.microsoft.com/office/drawing/2014/main" id="{2E2F3D39-0C5E-479B-946A-A0E0F8C972B0}"/>
               </a:ext>
             </a:extLst>
           </p:cNvPr>
@@ -9217,7 +9240,7 @@
           <p:cNvPr id="7" name="">
             <a:extLst xmlns:a="http://schemas.openxmlformats.org/drawingml/2006/main">
               <a:ext uri="{FF2B5EF4-FFF2-40B4-BE49-F238E27FC236}">
-                <a16:creationId xmlns:a16="http://schemas.microsoft.com/office/drawing/2014/main" id="{68CC9957-06D5-4BBA-93DA-062DD31CEB15}"/>
+                <a16:creationId xmlns:a16="http://schemas.microsoft.com/office/drawing/2014/main" id="{44E1414C-82C6-4CF7-A83E-59D8AECA6F48}"/>
               </a:ext>
             </a:extLst>
           </p:cNvPr>
@@ -9285,7 +9308,7 @@
           <p:cNvPr id="8" name="">
             <a:extLst xmlns:a="http://schemas.openxmlformats.org/drawingml/2006/main">
               <a:ext uri="{FF2B5EF4-FFF2-40B4-BE49-F238E27FC236}">
-                <a16:creationId xmlns:a16="http://schemas.microsoft.com/office/drawing/2014/main" id="{8C961A84-28A0-4BD7-A073-F9FA24F22C30}"/>
+                <a16:creationId xmlns:a16="http://schemas.microsoft.com/office/drawing/2014/main" id="{F4A4C0D4-E9E7-4AFD-9CD8-BC66ECEBB71B}"/>
               </a:ext>
             </a:extLst>
           </p:cNvPr>
@@ -9351,7 +9374,7 @@
     </p:spTree>
     <p:extLst>
       <p:ext uri="{BB962C8B-B14F-4D97-AF65-F5344CB8AC3E}">
-        <p14:creationId xmlns:p14="http://schemas.microsoft.com/office/powerpoint/2010/main" val="699904804"/>
+        <p14:creationId xmlns:p14="http://schemas.microsoft.com/office/powerpoint/2010/main" val="1954696159"/>
       </p:ext>
     </p:extLst>
   </p:cSld>
@@ -9379,10 +9402,10 @@
       </p:grpSpPr>
       <p:sp>
         <p:nvSpPr>
-          <p:cNvPr id="7" name="">
+          <p:cNvPr id="6" name="">
             <a:extLst xmlns:a="http://schemas.openxmlformats.org/drawingml/2006/main">
               <a:ext uri="{FF2B5EF4-FFF2-40B4-BE49-F238E27FC236}">
-                <a16:creationId xmlns:a16="http://schemas.microsoft.com/office/drawing/2014/main" id="{4123EB70-FFFD-4C90-AF9E-83C4895E5F47}"/>
+                <a16:creationId xmlns:a16="http://schemas.microsoft.com/office/drawing/2014/main" id="{4F43F4BD-0FFA-43CA-92E7-0A8B3E3E2555}"/>
               </a:ext>
             </a:extLst>
           </p:cNvPr>
@@ -9440,7 +9463,7 @@
                 <a:ea typeface="Microsoft JhengHei"/>
                 <a:cs typeface="Microsoft JhengHei"/>
               </a:rPr>
-              <a:t>今天的交通安全重點</a:t>
+              <a:t>課堂的兩個重點</a:t>
             </a:r>
           </a:p>
         </p:txBody>
@@ -9450,7 +9473,7 @@
           <p:cNvPr id="2" name="">
             <a:extLst xmlns:a="http://schemas.openxmlformats.org/drawingml/2006/main">
               <a:ext uri="{FF2B5EF4-FFF2-40B4-BE49-F238E27FC236}">
-                <a16:creationId xmlns:a16="http://schemas.microsoft.com/office/drawing/2014/main" id="{7652F8DF-4D26-4C67-B7BD-21CDDFAA2108}"/>
+                <a16:creationId xmlns:a16="http://schemas.microsoft.com/office/drawing/2014/main" id="{43F71D24-2724-481D-9F60-0C11418EF52B}"/>
               </a:ext>
             </a:extLst>
           </p:cNvPr>
@@ -9508,7 +9531,7 @@
                 <a:ea typeface="Microsoft JhengHei"/>
                 <a:cs typeface="Microsoft JhengHei"/>
               </a:rPr>
-              <a:t>未成年通學者的安全選擇</a:t>
+              <a:t>看懂路口風險：號誌、停讓與大型車</a:t>
             </a:r>
           </a:p>
         </p:txBody>
@@ -9518,7 +9541,7 @@
           <p:cNvPr id="3" name="">
             <a:extLst xmlns:a="http://schemas.openxmlformats.org/drawingml/2006/main">
               <a:ext uri="{FF2B5EF4-FFF2-40B4-BE49-F238E27FC236}">
-                <a16:creationId xmlns:a16="http://schemas.microsoft.com/office/drawing/2014/main" id="{D9DD91FF-4FA3-4BD1-A6D1-9D43B4DC4C7E}"/>
+                <a16:creationId xmlns:a16="http://schemas.microsoft.com/office/drawing/2014/main" id="{AE53E438-CC10-4EC1-A4AD-BBAAA45BE4C6}"/>
               </a:ext>
             </a:extLst>
           </p:cNvPr>
@@ -9576,7 +9599,7 @@
                 <a:ea typeface="Microsoft JhengHei"/>
                 <a:cs typeface="Microsoft JhengHei"/>
               </a:rPr>
-              <a:t>成年後的駕駛責任</a:t>
+              <a:t>做出安全通學選擇：合法騎乘與用路責任</a:t>
             </a:r>
           </a:p>
         </p:txBody>
@@ -9586,75 +9609,7 @@
           <p:cNvPr id="4" name="">
             <a:extLst xmlns:a="http://schemas.openxmlformats.org/drawingml/2006/main">
               <a:ext uri="{FF2B5EF4-FFF2-40B4-BE49-F238E27FC236}">
-                <a16:creationId xmlns:a16="http://schemas.microsoft.com/office/drawing/2014/main" id="{0C7B287E-275D-4800-AD19-0B5CE38D1A96}"/>
-              </a:ext>
-            </a:extLst>
-          </p:cNvPr>
-          <p:cNvSpPr>
-            <a:spLocks xmlns:a="http://schemas.openxmlformats.org/drawingml/2006/main" noGrp="1"/>
-          </p:cNvSpPr>
-          <p:nvPr/>
-        </p:nvSpPr>
-        <p:spPr>
-          <a:xfrm xmlns:a="http://schemas.openxmlformats.org/drawingml/2006/main">
-            <a:off x="714375" y="3943350"/>
-            <a:ext cx="10715625" cy="838200"/>
-          </a:xfrm>
-          <a:prstGeom xmlns:a="http://schemas.openxmlformats.org/drawingml/2006/main" prst="rect">
-            <a:avLst/>
-          </a:prstGeom>
-          <a:noFill xmlns:a="http://schemas.openxmlformats.org/drawingml/2006/main"/>
-          <a:ln xmlns:a="http://schemas.openxmlformats.org/drawingml/2006/main" w="0">
-            <a:noFill/>
-          </a:ln>
-        </p:spPr>
-        <p:txBody>
-          <a:bodyPr xmlns:a="http://schemas.openxmlformats.org/drawingml/2006/main" wrap="square" lIns="0" tIns="0" rIns="0" bIns="0" anchor="t">
-            <a:noAutofit/>
-          </a:bodyPr>
-          <a:lstStyle xmlns:a="http://schemas.openxmlformats.org/drawingml/2006/main">
-            <a:defPPr>
-              <a:defRPr sz="2475" b="0">
-                <a:solidFill>
-                  <a:srgbClr val="10283E"/>
-                </a:solidFill>
-                <a:latin typeface="Microsoft JhengHei"/>
-                <a:ea typeface="Microsoft JhengHei"/>
-                <a:cs typeface="Microsoft JhengHei"/>
-              </a:defRPr>
-            </a:defPPr>
-          </a:lstStyle>
-          <a:p xmlns:a="http://schemas.openxmlformats.org/drawingml/2006/main">
-            <a:pPr>
-              <a:defRPr sz="2475" b="0">
-                <a:solidFill>
-                  <a:srgbClr val="10283E"/>
-                </a:solidFill>
-                <a:latin typeface="Microsoft JhengHei"/>
-                <a:ea typeface="Microsoft JhengHei"/>
-                <a:cs typeface="Microsoft JhengHei"/>
-              </a:defRPr>
-            </a:pPr>
-            <a:r>
-              <a:rPr sz="2475" b="0">
-                <a:solidFill>
-                  <a:srgbClr val="10283E"/>
-                </a:solidFill>
-                <a:latin typeface="Microsoft JhengHei"/>
-                <a:ea typeface="Microsoft JhengHei"/>
-                <a:cs typeface="Microsoft JhengHei"/>
-              </a:rPr>
-              <a:t>重要法規與楊梅高中周邊通學</a:t>
-            </a:r>
-          </a:p>
-        </p:txBody>
-      </p:sp>
-      <p:sp>
-        <p:nvSpPr>
-          <p:cNvPr id="5" name="">
-            <a:extLst xmlns:a="http://schemas.openxmlformats.org/drawingml/2006/main">
-              <a:ext uri="{FF2B5EF4-FFF2-40B4-BE49-F238E27FC236}">
-                <a16:creationId xmlns:a16="http://schemas.microsoft.com/office/drawing/2014/main" id="{CE4481E0-034F-4F1D-A7BA-74D9D98FD21B}"/>
+                <a16:creationId xmlns:a16="http://schemas.microsoft.com/office/drawing/2014/main" id="{3CDA716D-2173-4394-AD5A-B60C2454CB1C}"/>
               </a:ext>
             </a:extLst>
           </p:cNvPr>
@@ -9719,10 +9674,10 @@
       </p:sp>
       <p:sp>
         <p:nvSpPr>
-          <p:cNvPr id="6" name="">
+          <p:cNvPr id="5" name="">
             <a:extLst xmlns:a="http://schemas.openxmlformats.org/drawingml/2006/main">
               <a:ext uri="{FF2B5EF4-FFF2-40B4-BE49-F238E27FC236}">
-                <a16:creationId xmlns:a16="http://schemas.microsoft.com/office/drawing/2014/main" id="{DD45ED18-7E4E-4B14-ACA7-A652D3075A45}"/>
+                <a16:creationId xmlns:a16="http://schemas.microsoft.com/office/drawing/2014/main" id="{E4B04B7E-319E-42BD-B18D-40EADDDC9B71}"/>
               </a:ext>
             </a:extLst>
           </p:cNvPr>
@@ -9788,7 +9743,7 @@
     </p:spTree>
     <p:extLst>
       <p:ext uri="{BB962C8B-B14F-4D97-AF65-F5344CB8AC3E}">
-        <p14:creationId xmlns:p14="http://schemas.microsoft.com/office/powerpoint/2010/main" val="786387663"/>
+        <p14:creationId xmlns:p14="http://schemas.microsoft.com/office/powerpoint/2010/main" val="276440141"/>
       </p:ext>
     </p:extLst>
   </p:cSld>
@@ -9819,7 +9774,7 @@
           <p:cNvPr id="7" name="">
             <a:extLst xmlns:a="http://schemas.openxmlformats.org/drawingml/2006/main">
               <a:ext uri="{FF2B5EF4-FFF2-40B4-BE49-F238E27FC236}">
-                <a16:creationId xmlns:a16="http://schemas.microsoft.com/office/drawing/2014/main" id="{17726B76-A6DA-493A-BA6B-E79DCDF474C9}"/>
+                <a16:creationId xmlns:a16="http://schemas.microsoft.com/office/drawing/2014/main" id="{E7D1A017-69C0-4DDC-A529-888EE15A387D}"/>
               </a:ext>
             </a:extLst>
           </p:cNvPr>
@@ -9877,7 +9832,7 @@
                 <a:ea typeface="Microsoft JhengHei"/>
                 <a:cs typeface="Microsoft JhengHei"/>
               </a:rPr>
-              <a:t>今天放學的具體行動</a:t>
+              <a:t>楊光梅好、安全第一</a:t>
             </a:r>
           </a:p>
         </p:txBody>
@@ -9887,7 +9842,7 @@
           <p:cNvPr id="2" name="">
             <a:extLst xmlns:a="http://schemas.openxmlformats.org/drawingml/2006/main">
               <a:ext uri="{FF2B5EF4-FFF2-40B4-BE49-F238E27FC236}">
-                <a16:creationId xmlns:a16="http://schemas.microsoft.com/office/drawing/2014/main" id="{7A3D4992-6600-4885-94D0-221B739B8A52}"/>
+                <a16:creationId xmlns:a16="http://schemas.microsoft.com/office/drawing/2014/main" id="{1CFAE6F8-13E3-49A5-A1F5-7E64AD74399A}"/>
               </a:ext>
             </a:extLst>
           </p:cNvPr>
@@ -9955,7 +9910,7 @@
           <p:cNvPr id="3" name="">
             <a:extLst xmlns:a="http://schemas.openxmlformats.org/drawingml/2006/main">
               <a:ext uri="{FF2B5EF4-FFF2-40B4-BE49-F238E27FC236}">
-                <a16:creationId xmlns:a16="http://schemas.microsoft.com/office/drawing/2014/main" id="{2C75F558-51DA-496A-AD29-4B242589E21D}"/>
+                <a16:creationId xmlns:a16="http://schemas.microsoft.com/office/drawing/2014/main" id="{66B5376E-136E-4358-AE60-F6DF4C26FC8B}"/>
               </a:ext>
             </a:extLst>
           </p:cNvPr>
@@ -10023,7 +9978,7 @@
           <p:cNvPr id="4" name="">
             <a:extLst xmlns:a="http://schemas.openxmlformats.org/drawingml/2006/main">
               <a:ext uri="{FF2B5EF4-FFF2-40B4-BE49-F238E27FC236}">
-                <a16:creationId xmlns:a16="http://schemas.microsoft.com/office/drawing/2014/main" id="{6B4C984A-AD1A-4894-817F-63F6557DD28F}"/>
+                <a16:creationId xmlns:a16="http://schemas.microsoft.com/office/drawing/2014/main" id="{C6063E08-31D8-403C-A326-B5FC185421B5}"/>
               </a:ext>
             </a:extLst>
           </p:cNvPr>
@@ -10091,7 +10046,7 @@
           <p:cNvPr id="5" name="">
             <a:extLst xmlns:a="http://schemas.openxmlformats.org/drawingml/2006/main">
               <a:ext uri="{FF2B5EF4-FFF2-40B4-BE49-F238E27FC236}">
-                <a16:creationId xmlns:a16="http://schemas.microsoft.com/office/drawing/2014/main" id="{024EB73B-B779-44AC-BB7E-6BFA11953E8C}"/>
+                <a16:creationId xmlns:a16="http://schemas.microsoft.com/office/drawing/2014/main" id="{966E3D9B-501E-43FF-BD1D-6D323C12DF42}"/>
               </a:ext>
             </a:extLst>
           </p:cNvPr>
@@ -10159,7 +10114,7 @@
           <p:cNvPr id="6" name="">
             <a:extLst xmlns:a="http://schemas.openxmlformats.org/drawingml/2006/main">
               <a:ext uri="{FF2B5EF4-FFF2-40B4-BE49-F238E27FC236}">
-                <a16:creationId xmlns:a16="http://schemas.microsoft.com/office/drawing/2014/main" id="{81D90B73-9951-4D20-9FA3-E237427B89C7}"/>
+                <a16:creationId xmlns:a16="http://schemas.microsoft.com/office/drawing/2014/main" id="{FF4155BF-3CBE-4A59-90FC-F957A8CAA4A2}"/>
               </a:ext>
             </a:extLst>
           </p:cNvPr>
@@ -10225,7 +10180,7 @@
     </p:spTree>
     <p:extLst>
       <p:ext uri="{BB962C8B-B14F-4D97-AF65-F5344CB8AC3E}">
-        <p14:creationId xmlns:p14="http://schemas.microsoft.com/office/powerpoint/2010/main" val="365658601"/>
+        <p14:creationId xmlns:p14="http://schemas.microsoft.com/office/powerpoint/2010/main" val="293559209"/>
       </p:ext>
     </p:extLst>
   </p:cSld>
@@ -10256,7 +10211,7 @@
           <p:cNvPr id="7" name="">
             <a:extLst xmlns:a="http://schemas.openxmlformats.org/drawingml/2006/main">
               <a:ext uri="{FF2B5EF4-FFF2-40B4-BE49-F238E27FC236}">
-                <a16:creationId xmlns:a16="http://schemas.microsoft.com/office/drawing/2014/main" id="{976CDD84-6C14-4B1D-B4DE-18119B8D004A}"/>
+                <a16:creationId xmlns:a16="http://schemas.microsoft.com/office/drawing/2014/main" id="{2EC3C8CE-336C-4CBD-B3A1-3E7AE3439B9F}"/>
               </a:ext>
             </a:extLst>
           </p:cNvPr>
@@ -10324,7 +10279,7 @@
           <p:cNvPr id="2" name="">
             <a:extLst xmlns:a="http://schemas.openxmlformats.org/drawingml/2006/main">
               <a:ext uri="{FF2B5EF4-FFF2-40B4-BE49-F238E27FC236}">
-                <a16:creationId xmlns:a16="http://schemas.microsoft.com/office/drawing/2014/main" id="{6E769741-C066-4D70-9CC9-D23899682851}"/>
+                <a16:creationId xmlns:a16="http://schemas.microsoft.com/office/drawing/2014/main" id="{060C4AB2-B14E-495E-AA80-6184F8F2B198}"/>
               </a:ext>
             </a:extLst>
           </p:cNvPr>
@@ -10392,7 +10347,7 @@
           <p:cNvPr id="3" name="">
             <a:extLst xmlns:a="http://schemas.openxmlformats.org/drawingml/2006/main">
               <a:ext uri="{FF2B5EF4-FFF2-40B4-BE49-F238E27FC236}">
-                <a16:creationId xmlns:a16="http://schemas.microsoft.com/office/drawing/2014/main" id="{6AFCF252-4BD6-496C-A20E-4C2D53279957}"/>
+                <a16:creationId xmlns:a16="http://schemas.microsoft.com/office/drawing/2014/main" id="{0C33BB01-1090-4DFB-BF0D-EDC403B897F7}"/>
               </a:ext>
             </a:extLst>
           </p:cNvPr>
@@ -10460,7 +10415,7 @@
           <p:cNvPr id="4" name="">
             <a:extLst xmlns:a="http://schemas.openxmlformats.org/drawingml/2006/main">
               <a:ext uri="{FF2B5EF4-FFF2-40B4-BE49-F238E27FC236}">
-                <a16:creationId xmlns:a16="http://schemas.microsoft.com/office/drawing/2014/main" id="{FE754596-9EE8-4802-BC83-68F33CB2089E}"/>
+                <a16:creationId xmlns:a16="http://schemas.microsoft.com/office/drawing/2014/main" id="{6747FE87-7D78-4426-889E-88EE4C660977}"/>
               </a:ext>
             </a:extLst>
           </p:cNvPr>
@@ -10528,7 +10483,7 @@
           <p:cNvPr id="5" name="">
             <a:extLst xmlns:a="http://schemas.openxmlformats.org/drawingml/2006/main">
               <a:ext uri="{FF2B5EF4-FFF2-40B4-BE49-F238E27FC236}">
-                <a16:creationId xmlns:a16="http://schemas.microsoft.com/office/drawing/2014/main" id="{824C59A7-D683-49C0-BC3E-2F2918DC80B8}"/>
+                <a16:creationId xmlns:a16="http://schemas.microsoft.com/office/drawing/2014/main" id="{A190A2D0-8865-4478-819D-92A3B89AAE1A}"/>
               </a:ext>
             </a:extLst>
           </p:cNvPr>
@@ -10596,7 +10551,7 @@
           <p:cNvPr id="6" name="">
             <a:extLst xmlns:a="http://schemas.openxmlformats.org/drawingml/2006/main">
               <a:ext uri="{FF2B5EF4-FFF2-40B4-BE49-F238E27FC236}">
-                <a16:creationId xmlns:a16="http://schemas.microsoft.com/office/drawing/2014/main" id="{A1B96FE6-5F62-458D-8C04-287162CBB12D}"/>
+                <a16:creationId xmlns:a16="http://schemas.microsoft.com/office/drawing/2014/main" id="{49A3EF2C-2EDA-4CEF-B563-9967715645C5}"/>
               </a:ext>
             </a:extLst>
           </p:cNvPr>
@@ -10662,7 +10617,7 @@
     </p:spTree>
     <p:extLst>
       <p:ext uri="{BB962C8B-B14F-4D97-AF65-F5344CB8AC3E}">
-        <p14:creationId xmlns:p14="http://schemas.microsoft.com/office/powerpoint/2010/main" val="1935596957"/>
+        <p14:creationId xmlns:p14="http://schemas.microsoft.com/office/powerpoint/2010/main" val="530992628"/>
       </p:ext>
     </p:extLst>
   </p:cSld>
@@ -10693,7 +10648,7 @@
           <p:cNvPr id="7" name="">
             <a:extLst xmlns:a="http://schemas.openxmlformats.org/drawingml/2006/main">
               <a:ext uri="{FF2B5EF4-FFF2-40B4-BE49-F238E27FC236}">
-                <a16:creationId xmlns:a16="http://schemas.microsoft.com/office/drawing/2014/main" id="{5738CF36-9529-47F9-80CB-E1AEF9B04EA6}"/>
+                <a16:creationId xmlns:a16="http://schemas.microsoft.com/office/drawing/2014/main" id="{6D937C37-6D1F-4A55-B4A1-98CF1801BFBB}"/>
               </a:ext>
             </a:extLst>
           </p:cNvPr>
@@ -10761,7 +10716,7 @@
           <p:cNvPr id="2" name="">
             <a:extLst xmlns:a="http://schemas.openxmlformats.org/drawingml/2006/main">
               <a:ext uri="{FF2B5EF4-FFF2-40B4-BE49-F238E27FC236}">
-                <a16:creationId xmlns:a16="http://schemas.microsoft.com/office/drawing/2014/main" id="{BDBA3B6F-0424-47E6-89DF-42CFA83CC178}"/>
+                <a16:creationId xmlns:a16="http://schemas.microsoft.com/office/drawing/2014/main" id="{139D141F-ADE3-4274-818D-44AFCBB1FF84}"/>
               </a:ext>
             </a:extLst>
           </p:cNvPr>
@@ -10829,7 +10784,7 @@
           <p:cNvPr id="3" name="">
             <a:extLst xmlns:a="http://schemas.openxmlformats.org/drawingml/2006/main">
               <a:ext uri="{FF2B5EF4-FFF2-40B4-BE49-F238E27FC236}">
-                <a16:creationId xmlns:a16="http://schemas.microsoft.com/office/drawing/2014/main" id="{1DCA196A-1338-421C-9F67-E16EACAA399E}"/>
+                <a16:creationId xmlns:a16="http://schemas.microsoft.com/office/drawing/2014/main" id="{E2B21D93-6251-45B4-A6A6-65668B454B36}"/>
               </a:ext>
             </a:extLst>
           </p:cNvPr>
@@ -10897,7 +10852,7 @@
           <p:cNvPr id="4" name="">
             <a:extLst xmlns:a="http://schemas.openxmlformats.org/drawingml/2006/main">
               <a:ext uri="{FF2B5EF4-FFF2-40B4-BE49-F238E27FC236}">
-                <a16:creationId xmlns:a16="http://schemas.microsoft.com/office/drawing/2014/main" id="{99D1F0A8-A6B1-4BDA-9F0A-90F59691503F}"/>
+                <a16:creationId xmlns:a16="http://schemas.microsoft.com/office/drawing/2014/main" id="{6F800180-1F8C-4046-ACF9-3E6F1CA7DC21}"/>
               </a:ext>
             </a:extLst>
           </p:cNvPr>
@@ -10965,7 +10920,7 @@
           <p:cNvPr id="5" name="">
             <a:extLst xmlns:a="http://schemas.openxmlformats.org/drawingml/2006/main">
               <a:ext uri="{FF2B5EF4-FFF2-40B4-BE49-F238E27FC236}">
-                <a16:creationId xmlns:a16="http://schemas.microsoft.com/office/drawing/2014/main" id="{F10B3B00-08D8-49BD-AB7A-96E82E213585}"/>
+                <a16:creationId xmlns:a16="http://schemas.microsoft.com/office/drawing/2014/main" id="{5F81E0D7-CBDC-4ACF-87AB-E6C3257F00D6}"/>
               </a:ext>
             </a:extLst>
           </p:cNvPr>
@@ -11033,7 +10988,7 @@
           <p:cNvPr id="6" name="">
             <a:extLst xmlns:a="http://schemas.openxmlformats.org/drawingml/2006/main">
               <a:ext uri="{FF2B5EF4-FFF2-40B4-BE49-F238E27FC236}">
-                <a16:creationId xmlns:a16="http://schemas.microsoft.com/office/drawing/2014/main" id="{DA73ED62-6DF4-4041-863F-1FBF08753319}"/>
+                <a16:creationId xmlns:a16="http://schemas.microsoft.com/office/drawing/2014/main" id="{7D4FE411-49AB-44D5-B2D6-628F4FD2ED96}"/>
               </a:ext>
             </a:extLst>
           </p:cNvPr>
@@ -11099,7 +11054,7 @@
     </p:spTree>
     <p:extLst>
       <p:ext uri="{BB962C8B-B14F-4D97-AF65-F5344CB8AC3E}">
-        <p14:creationId xmlns:p14="http://schemas.microsoft.com/office/powerpoint/2010/main" val="664770433"/>
+        <p14:creationId xmlns:p14="http://schemas.microsoft.com/office/powerpoint/2010/main" val="1102056094"/>
       </p:ext>
     </p:extLst>
   </p:cSld>
@@ -11130,7 +11085,7 @@
           <p:cNvPr id="7" name="">
             <a:extLst xmlns:a="http://schemas.openxmlformats.org/drawingml/2006/main">
               <a:ext uri="{FF2B5EF4-FFF2-40B4-BE49-F238E27FC236}">
-                <a16:creationId xmlns:a16="http://schemas.microsoft.com/office/drawing/2014/main" id="{A7B4B07E-7CE1-418A-AA7C-2CB6E6F4BE27}"/>
+                <a16:creationId xmlns:a16="http://schemas.microsoft.com/office/drawing/2014/main" id="{35B50500-FAE0-47C9-BD87-0F76EF1E2F45}"/>
               </a:ext>
             </a:extLst>
           </p:cNvPr>
@@ -11198,7 +11153,7 @@
           <p:cNvPr id="2" name="">
             <a:extLst xmlns:a="http://schemas.openxmlformats.org/drawingml/2006/main">
               <a:ext uri="{FF2B5EF4-FFF2-40B4-BE49-F238E27FC236}">
-                <a16:creationId xmlns:a16="http://schemas.microsoft.com/office/drawing/2014/main" id="{36B429B1-62EA-4216-A493-BFEB1BE153CA}"/>
+                <a16:creationId xmlns:a16="http://schemas.microsoft.com/office/drawing/2014/main" id="{85391882-F0C4-4CE3-BFDC-3D229A69472B}"/>
               </a:ext>
             </a:extLst>
           </p:cNvPr>
@@ -11266,7 +11221,7 @@
           <p:cNvPr id="3" name="">
             <a:extLst xmlns:a="http://schemas.openxmlformats.org/drawingml/2006/main">
               <a:ext uri="{FF2B5EF4-FFF2-40B4-BE49-F238E27FC236}">
-                <a16:creationId xmlns:a16="http://schemas.microsoft.com/office/drawing/2014/main" id="{8CFA84F0-E6E5-4BB0-9C53-1C6E994D5379}"/>
+                <a16:creationId xmlns:a16="http://schemas.microsoft.com/office/drawing/2014/main" id="{43BFCCDA-C8DD-4A1C-8AD1-273697F38957}"/>
               </a:ext>
             </a:extLst>
           </p:cNvPr>
@@ -11334,7 +11289,7 @@
           <p:cNvPr id="4" name="">
             <a:extLst xmlns:a="http://schemas.openxmlformats.org/drawingml/2006/main">
               <a:ext uri="{FF2B5EF4-FFF2-40B4-BE49-F238E27FC236}">
-                <a16:creationId xmlns:a16="http://schemas.microsoft.com/office/drawing/2014/main" id="{13F3DDA7-2202-4FF4-BC40-DD3A0B9AC980}"/>
+                <a16:creationId xmlns:a16="http://schemas.microsoft.com/office/drawing/2014/main" id="{3E3CFDB0-841C-445E-859F-86B5CA6D5EF8}"/>
               </a:ext>
             </a:extLst>
           </p:cNvPr>
@@ -11402,7 +11357,7 @@
           <p:cNvPr id="5" name="">
             <a:extLst xmlns:a="http://schemas.openxmlformats.org/drawingml/2006/main">
               <a:ext uri="{FF2B5EF4-FFF2-40B4-BE49-F238E27FC236}">
-                <a16:creationId xmlns:a16="http://schemas.microsoft.com/office/drawing/2014/main" id="{09354CAC-84A6-46D9-A694-18AF57DB67D1}"/>
+                <a16:creationId xmlns:a16="http://schemas.microsoft.com/office/drawing/2014/main" id="{BDBC90BA-C003-4D4E-A6C2-136C758B9EB9}"/>
               </a:ext>
             </a:extLst>
           </p:cNvPr>
@@ -11470,7 +11425,7 @@
           <p:cNvPr id="6" name="">
             <a:extLst xmlns:a="http://schemas.openxmlformats.org/drawingml/2006/main">
               <a:ext uri="{FF2B5EF4-FFF2-40B4-BE49-F238E27FC236}">
-                <a16:creationId xmlns:a16="http://schemas.microsoft.com/office/drawing/2014/main" id="{B9464B3E-7F9F-4117-84AA-C4D696D59AB1}"/>
+                <a16:creationId xmlns:a16="http://schemas.microsoft.com/office/drawing/2014/main" id="{5C18EEF7-DC0F-491E-8218-3E514E8D81E2}"/>
               </a:ext>
             </a:extLst>
           </p:cNvPr>
@@ -11536,7 +11491,7 @@
     </p:spTree>
     <p:extLst>
       <p:ext uri="{BB962C8B-B14F-4D97-AF65-F5344CB8AC3E}">
-        <p14:creationId xmlns:p14="http://schemas.microsoft.com/office/powerpoint/2010/main" val="592597624"/>
+        <p14:creationId xmlns:p14="http://schemas.microsoft.com/office/powerpoint/2010/main" val="2062257134"/>
       </p:ext>
     </p:extLst>
   </p:cSld>
@@ -11567,7 +11522,7 @@
           <p:cNvPr id="6" name="">
             <a:extLst xmlns:a="http://schemas.openxmlformats.org/drawingml/2006/main">
               <a:ext uri="{FF2B5EF4-FFF2-40B4-BE49-F238E27FC236}">
-                <a16:creationId xmlns:a16="http://schemas.microsoft.com/office/drawing/2014/main" id="{F5AC5201-6722-4643-AB0B-8856D2207EFC}"/>
+                <a16:creationId xmlns:a16="http://schemas.microsoft.com/office/drawing/2014/main" id="{3B6927CE-FE5E-4E1A-9019-6954FD1D7FA0}"/>
               </a:ext>
             </a:extLst>
           </p:cNvPr>
@@ -11635,7 +11590,7 @@
           <p:cNvPr id="2" name="">
             <a:extLst xmlns:a="http://schemas.openxmlformats.org/drawingml/2006/main">
               <a:ext uri="{FF2B5EF4-FFF2-40B4-BE49-F238E27FC236}">
-                <a16:creationId xmlns:a16="http://schemas.microsoft.com/office/drawing/2014/main" id="{2F2AF702-DC26-4F9D-A16A-FDDB5F81D0BF}"/>
+                <a16:creationId xmlns:a16="http://schemas.microsoft.com/office/drawing/2014/main" id="{C9491C6A-BD0C-4C6D-8184-F8AB5B23C6A4}"/>
               </a:ext>
             </a:extLst>
           </p:cNvPr>
@@ -11703,7 +11658,7 @@
           <p:cNvPr id="3" name="">
             <a:extLst xmlns:a="http://schemas.openxmlformats.org/drawingml/2006/main">
               <a:ext uri="{FF2B5EF4-FFF2-40B4-BE49-F238E27FC236}">
-                <a16:creationId xmlns:a16="http://schemas.microsoft.com/office/drawing/2014/main" id="{0BBA1BF8-7ECF-49F7-9245-DC0B3D09798A}"/>
+                <a16:creationId xmlns:a16="http://schemas.microsoft.com/office/drawing/2014/main" id="{4E5B09E0-6CBB-4715-85AF-1615C7CB3023}"/>
               </a:ext>
             </a:extLst>
           </p:cNvPr>
@@ -11771,7 +11726,7 @@
           <p:cNvPr id="4" name="">
             <a:extLst xmlns:a="http://schemas.openxmlformats.org/drawingml/2006/main">
               <a:ext uri="{FF2B5EF4-FFF2-40B4-BE49-F238E27FC236}">
-                <a16:creationId xmlns:a16="http://schemas.microsoft.com/office/drawing/2014/main" id="{D613CB4A-6E29-4BB3-97E6-87798132B3DF}"/>
+                <a16:creationId xmlns:a16="http://schemas.microsoft.com/office/drawing/2014/main" id="{4B7D8A59-9ADB-4F0E-81C6-58E1E96EA45B}"/>
               </a:ext>
             </a:extLst>
           </p:cNvPr>
@@ -11828,7 +11783,7 @@
                 <a:latin typeface="Microsoft JhengHei"/>
                 <a:ea typeface="Microsoft JhengHei"/>
                 <a:cs typeface="Microsoft JhengHei"/>
-                <a:hlinkClick xmlns:r="http://schemas.openxmlformats.org/officeDocument/2006/relationships" r:id="R4690889b43e74df3"/>
+                <a:hlinkClick xmlns:r="http://schemas.openxmlformats.org/officeDocument/2006/relationships" r:id="R24961675c928406d"/>
               </a:rPr>
               <a:t>公視新聞網　2026.03.11</a:t>
             </a:r>
@@ -11852,7 +11807,7 @@
                 <a:latin typeface="Microsoft JhengHei"/>
                 <a:ea typeface="Microsoft JhengHei"/>
                 <a:cs typeface="Microsoft JhengHei"/>
-                <a:hlinkClick xmlns:r="http://schemas.openxmlformats.org/officeDocument/2006/relationships" r:id="Rac1ddf2da4ff4cc2"/>
+                <a:hlinkClick xmlns:r="http://schemas.openxmlformats.org/officeDocument/2006/relationships" r:id="Rfe5b510c31d14587"/>
               </a:rPr>
               <a:t>點選觀看新聞片段</a:t>
             </a:r>
@@ -11864,7 +11819,7 @@
           <p:cNvPr id="5" name="">
             <a:extLst xmlns:a="http://schemas.openxmlformats.org/drawingml/2006/main">
               <a:ext uri="{FF2B5EF4-FFF2-40B4-BE49-F238E27FC236}">
-                <a16:creationId xmlns:a16="http://schemas.microsoft.com/office/drawing/2014/main" id="{E09BE66E-FB90-4C13-BFA7-114A8E5726A2}"/>
+                <a16:creationId xmlns:a16="http://schemas.microsoft.com/office/drawing/2014/main" id="{A9ED473B-B808-4494-9F38-020B25DC10E6}"/>
               </a:ext>
             </a:extLst>
           </p:cNvPr>
@@ -11930,7 +11885,7 @@
     </p:spTree>
     <p:extLst>
       <p:ext uri="{BB962C8B-B14F-4D97-AF65-F5344CB8AC3E}">
-        <p14:creationId xmlns:p14="http://schemas.microsoft.com/office/powerpoint/2010/main" val="410033195"/>
+        <p14:creationId xmlns:p14="http://schemas.microsoft.com/office/powerpoint/2010/main" val="897174207"/>
       </p:ext>
     </p:extLst>
   </p:cSld>
@@ -11961,7 +11916,7 @@
           <p:cNvPr id="7" name="">
             <a:extLst xmlns:a="http://schemas.openxmlformats.org/drawingml/2006/main">
               <a:ext uri="{FF2B5EF4-FFF2-40B4-BE49-F238E27FC236}">
-                <a16:creationId xmlns:a16="http://schemas.microsoft.com/office/drawing/2014/main" id="{85541550-5338-4960-9752-C26E35EA5CB9}"/>
+                <a16:creationId xmlns:a16="http://schemas.microsoft.com/office/drawing/2014/main" id="{255C22ED-CD97-4558-9D22-076929F8F01D}"/>
               </a:ext>
             </a:extLst>
           </p:cNvPr>
@@ -12029,7 +11984,7 @@
           <p:cNvPr id="2" name="">
             <a:extLst xmlns:a="http://schemas.openxmlformats.org/drawingml/2006/main">
               <a:ext uri="{FF2B5EF4-FFF2-40B4-BE49-F238E27FC236}">
-                <a16:creationId xmlns:a16="http://schemas.microsoft.com/office/drawing/2014/main" id="{4B3ED6DA-FA58-44E0-9C7B-5BF7B7C7ABDC}"/>
+                <a16:creationId xmlns:a16="http://schemas.microsoft.com/office/drawing/2014/main" id="{E4FE78ED-87F6-4C24-A245-D56210B9AC12}"/>
               </a:ext>
             </a:extLst>
           </p:cNvPr>
@@ -12097,7 +12052,7 @@
           <p:cNvPr id="3" name="">
             <a:extLst xmlns:a="http://schemas.openxmlformats.org/drawingml/2006/main">
               <a:ext uri="{FF2B5EF4-FFF2-40B4-BE49-F238E27FC236}">
-                <a16:creationId xmlns:a16="http://schemas.microsoft.com/office/drawing/2014/main" id="{650C745C-2872-4D13-8F83-72D9FB9D80F6}"/>
+                <a16:creationId xmlns:a16="http://schemas.microsoft.com/office/drawing/2014/main" id="{11ACCBC2-9A87-495C-B84F-DABDFD42A413}"/>
               </a:ext>
             </a:extLst>
           </p:cNvPr>
@@ -12165,7 +12120,7 @@
           <p:cNvPr id="4" name="">
             <a:extLst xmlns:a="http://schemas.openxmlformats.org/drawingml/2006/main">
               <a:ext uri="{FF2B5EF4-FFF2-40B4-BE49-F238E27FC236}">
-                <a16:creationId xmlns:a16="http://schemas.microsoft.com/office/drawing/2014/main" id="{3760DFEF-93A4-4657-AE35-7E06EEDD733E}"/>
+                <a16:creationId xmlns:a16="http://schemas.microsoft.com/office/drawing/2014/main" id="{70D32B30-A20B-45AE-A7D9-B4A9B3D2FDE3}"/>
               </a:ext>
             </a:extLst>
           </p:cNvPr>
@@ -12233,7 +12188,7 @@
           <p:cNvPr id="5" name="">
             <a:extLst xmlns:a="http://schemas.openxmlformats.org/drawingml/2006/main">
               <a:ext uri="{FF2B5EF4-FFF2-40B4-BE49-F238E27FC236}">
-                <a16:creationId xmlns:a16="http://schemas.microsoft.com/office/drawing/2014/main" id="{035E139E-C61E-422D-98E3-9ECE238F8321}"/>
+                <a16:creationId xmlns:a16="http://schemas.microsoft.com/office/drawing/2014/main" id="{08E238DC-5BB5-482E-899F-A57ED9C711C8}"/>
               </a:ext>
             </a:extLst>
           </p:cNvPr>
@@ -12301,7 +12256,7 @@
           <p:cNvPr id="6" name="">
             <a:extLst xmlns:a="http://schemas.openxmlformats.org/drawingml/2006/main">
               <a:ext uri="{FF2B5EF4-FFF2-40B4-BE49-F238E27FC236}">
-                <a16:creationId xmlns:a16="http://schemas.microsoft.com/office/drawing/2014/main" id="{BA82D507-11C8-42A2-94BA-A2F73888048E}"/>
+                <a16:creationId xmlns:a16="http://schemas.microsoft.com/office/drawing/2014/main" id="{F86B394F-6554-4E00-9A0E-6452891AB88E}"/>
               </a:ext>
             </a:extLst>
           </p:cNvPr>
@@ -12367,7 +12322,7 @@
     </p:spTree>
     <p:extLst>
       <p:ext uri="{BB962C8B-B14F-4D97-AF65-F5344CB8AC3E}">
-        <p14:creationId xmlns:p14="http://schemas.microsoft.com/office/powerpoint/2010/main" val="656292664"/>
+        <p14:creationId xmlns:p14="http://schemas.microsoft.com/office/powerpoint/2010/main" val="18535069"/>
       </p:ext>
     </p:extLst>
   </p:cSld>
@@ -12398,7 +12353,7 @@
           <p:cNvPr id="7" name="">
             <a:extLst xmlns:a="http://schemas.openxmlformats.org/drawingml/2006/main">
               <a:ext uri="{FF2B5EF4-FFF2-40B4-BE49-F238E27FC236}">
-                <a16:creationId xmlns:a16="http://schemas.microsoft.com/office/drawing/2014/main" id="{D93A53B4-B285-4BB2-873D-2CF02AECE3A8}"/>
+                <a16:creationId xmlns:a16="http://schemas.microsoft.com/office/drawing/2014/main" id="{D5A2169A-4E4E-42B0-A602-1F932C66E479}"/>
               </a:ext>
             </a:extLst>
           </p:cNvPr>
@@ -12456,7 +12411,7 @@
                 <a:ea typeface="Microsoft JhengHei"/>
                 <a:cs typeface="Microsoft JhengHei"/>
               </a:rPr>
-              <a:t>行人號誌與穿越選擇</a:t>
+              <a:t>重點一　看懂路口風險</a:t>
             </a:r>
           </a:p>
         </p:txBody>
@@ -12466,7 +12421,7 @@
           <p:cNvPr id="2" name="">
             <a:extLst xmlns:a="http://schemas.openxmlformats.org/drawingml/2006/main">
               <a:ext uri="{FF2B5EF4-FFF2-40B4-BE49-F238E27FC236}">
-                <a16:creationId xmlns:a16="http://schemas.microsoft.com/office/drawing/2014/main" id="{13172EAA-47DE-4C97-990A-C5FA19E95F70}"/>
+                <a16:creationId xmlns:a16="http://schemas.microsoft.com/office/drawing/2014/main" id="{2C5C571E-DDC3-4721-94DB-A1629E151E47}"/>
               </a:ext>
             </a:extLst>
           </p:cNvPr>
@@ -12534,7 +12489,7 @@
           <p:cNvPr id="3" name="">
             <a:extLst xmlns:a="http://schemas.openxmlformats.org/drawingml/2006/main">
               <a:ext uri="{FF2B5EF4-FFF2-40B4-BE49-F238E27FC236}">
-                <a16:creationId xmlns:a16="http://schemas.microsoft.com/office/drawing/2014/main" id="{1E1C4F86-F222-49B9-AE17-185EA0B42A87}"/>
+                <a16:creationId xmlns:a16="http://schemas.microsoft.com/office/drawing/2014/main" id="{2C81E4E5-085F-4E2C-BF80-3BB005EBBFFB}"/>
               </a:ext>
             </a:extLst>
           </p:cNvPr>
@@ -12602,7 +12557,7 @@
           <p:cNvPr id="4" name="">
             <a:extLst xmlns:a="http://schemas.openxmlformats.org/drawingml/2006/main">
               <a:ext uri="{FF2B5EF4-FFF2-40B4-BE49-F238E27FC236}">
-                <a16:creationId xmlns:a16="http://schemas.microsoft.com/office/drawing/2014/main" id="{6A888B2B-C536-45C8-A899-19158FC4E4C7}"/>
+                <a16:creationId xmlns:a16="http://schemas.microsoft.com/office/drawing/2014/main" id="{CBDD4BF4-CFEC-4A38-BDA5-C2B4B3EE5780}"/>
               </a:ext>
             </a:extLst>
           </p:cNvPr>
@@ -12670,7 +12625,7 @@
           <p:cNvPr id="5" name="">
             <a:extLst xmlns:a="http://schemas.openxmlformats.org/drawingml/2006/main">
               <a:ext uri="{FF2B5EF4-FFF2-40B4-BE49-F238E27FC236}">
-                <a16:creationId xmlns:a16="http://schemas.microsoft.com/office/drawing/2014/main" id="{59DE6FAD-1A1D-4085-A2BC-6CC285F9E878}"/>
+                <a16:creationId xmlns:a16="http://schemas.microsoft.com/office/drawing/2014/main" id="{EC176E7D-9FC4-46FB-8673-982002D40444}"/>
               </a:ext>
             </a:extLst>
           </p:cNvPr>
@@ -12738,7 +12693,7 @@
           <p:cNvPr id="6" name="">
             <a:extLst xmlns:a="http://schemas.openxmlformats.org/drawingml/2006/main">
               <a:ext uri="{FF2B5EF4-FFF2-40B4-BE49-F238E27FC236}">
-                <a16:creationId xmlns:a16="http://schemas.microsoft.com/office/drawing/2014/main" id="{F435FC3B-4C43-4951-8CE4-C559FC1E9A63}"/>
+                <a16:creationId xmlns:a16="http://schemas.microsoft.com/office/drawing/2014/main" id="{797D0565-0267-4B50-9DE6-F405A797B726}"/>
               </a:ext>
             </a:extLst>
           </p:cNvPr>
@@ -12804,7 +12759,7 @@
     </p:spTree>
     <p:extLst>
       <p:ext uri="{BB962C8B-B14F-4D97-AF65-F5344CB8AC3E}">
-        <p14:creationId xmlns:p14="http://schemas.microsoft.com/office/powerpoint/2010/main" val="774514210"/>
+        <p14:creationId xmlns:p14="http://schemas.microsoft.com/office/powerpoint/2010/main" val="1438570691"/>
       </p:ext>
     </p:extLst>
   </p:cSld>
@@ -12835,7 +12790,7 @@
           <p:cNvPr id="7" name="">
             <a:extLst xmlns:a="http://schemas.openxmlformats.org/drawingml/2006/main">
               <a:ext uri="{FF2B5EF4-FFF2-40B4-BE49-F238E27FC236}">
-                <a16:creationId xmlns:a16="http://schemas.microsoft.com/office/drawing/2014/main" id="{EAD67DFD-E9B1-4471-8A90-A359B9F6D2A0}"/>
+                <a16:creationId xmlns:a16="http://schemas.microsoft.com/office/drawing/2014/main" id="{49737A33-5182-40CF-B28B-53C5630DEC82}"/>
               </a:ext>
             </a:extLst>
           </p:cNvPr>
@@ -12903,7 +12858,7 @@
           <p:cNvPr id="2" name="">
             <a:extLst xmlns:a="http://schemas.openxmlformats.org/drawingml/2006/main">
               <a:ext uri="{FF2B5EF4-FFF2-40B4-BE49-F238E27FC236}">
-                <a16:creationId xmlns:a16="http://schemas.microsoft.com/office/drawing/2014/main" id="{7D7D7D58-AF78-4219-85AE-51B7EBC4FF7E}"/>
+                <a16:creationId xmlns:a16="http://schemas.microsoft.com/office/drawing/2014/main" id="{A4E6A89D-060F-4361-A449-BA3250610CA1}"/>
               </a:ext>
             </a:extLst>
           </p:cNvPr>
@@ -12971,7 +12926,7 @@
           <p:cNvPr id="3" name="">
             <a:extLst xmlns:a="http://schemas.openxmlformats.org/drawingml/2006/main">
               <a:ext uri="{FF2B5EF4-FFF2-40B4-BE49-F238E27FC236}">
-                <a16:creationId xmlns:a16="http://schemas.microsoft.com/office/drawing/2014/main" id="{BE5F4F21-26D9-4353-BE65-88C48CAA429D}"/>
+                <a16:creationId xmlns:a16="http://schemas.microsoft.com/office/drawing/2014/main" id="{DCA75D4C-AD3B-44E6-BDD4-21E64072A9E8}"/>
               </a:ext>
             </a:extLst>
           </p:cNvPr>
@@ -13039,7 +12994,7 @@
           <p:cNvPr id="4" name="">
             <a:extLst xmlns:a="http://schemas.openxmlformats.org/drawingml/2006/main">
               <a:ext uri="{FF2B5EF4-FFF2-40B4-BE49-F238E27FC236}">
-                <a16:creationId xmlns:a16="http://schemas.microsoft.com/office/drawing/2014/main" id="{FAF9C124-E582-4A98-8B84-335F6A4840A3}"/>
+                <a16:creationId xmlns:a16="http://schemas.microsoft.com/office/drawing/2014/main" id="{7D377F51-1D2E-46CA-B3A3-8C7E378391BB}"/>
               </a:ext>
             </a:extLst>
           </p:cNvPr>
@@ -13107,7 +13062,7 @@
           <p:cNvPr id="5" name="">
             <a:extLst xmlns:a="http://schemas.openxmlformats.org/drawingml/2006/main">
               <a:ext uri="{FF2B5EF4-FFF2-40B4-BE49-F238E27FC236}">
-                <a16:creationId xmlns:a16="http://schemas.microsoft.com/office/drawing/2014/main" id="{F6DA6B5D-F19A-4425-B892-E1811BA202FC}"/>
+                <a16:creationId xmlns:a16="http://schemas.microsoft.com/office/drawing/2014/main" id="{6805ACCD-094B-451D-9C5A-0F18D0B5AD14}"/>
               </a:ext>
             </a:extLst>
           </p:cNvPr>
@@ -13175,7 +13130,7 @@
           <p:cNvPr id="6" name="">
             <a:extLst xmlns:a="http://schemas.openxmlformats.org/drawingml/2006/main">
               <a:ext uri="{FF2B5EF4-FFF2-40B4-BE49-F238E27FC236}">
-                <a16:creationId xmlns:a16="http://schemas.microsoft.com/office/drawing/2014/main" id="{83E889CA-7301-4056-8D04-B430C31B333A}"/>
+                <a16:creationId xmlns:a16="http://schemas.microsoft.com/office/drawing/2014/main" id="{27512D1B-52EB-47B5-BAFB-C381A59A47A3}"/>
               </a:ext>
             </a:extLst>
           </p:cNvPr>
@@ -13241,7 +13196,7 @@
     </p:spTree>
     <p:extLst>
       <p:ext uri="{BB962C8B-B14F-4D97-AF65-F5344CB8AC3E}">
-        <p14:creationId xmlns:p14="http://schemas.microsoft.com/office/powerpoint/2010/main" val="2035149280"/>
+        <p14:creationId xmlns:p14="http://schemas.microsoft.com/office/powerpoint/2010/main" val="36221869"/>
       </p:ext>
     </p:extLst>
   </p:cSld>
@@ -13272,7 +13227,7 @@
           <p:cNvPr id="7" name="">
             <a:extLst xmlns:a="http://schemas.openxmlformats.org/drawingml/2006/main">
               <a:ext uri="{FF2B5EF4-FFF2-40B4-BE49-F238E27FC236}">
-                <a16:creationId xmlns:a16="http://schemas.microsoft.com/office/drawing/2014/main" id="{0CA5F86F-4687-42A5-90DA-EF3DD26CCE86}"/>
+                <a16:creationId xmlns:a16="http://schemas.microsoft.com/office/drawing/2014/main" id="{1C943450-6514-4D6F-BF20-CD4E81548077}"/>
               </a:ext>
             </a:extLst>
           </p:cNvPr>
@@ -13340,7 +13295,7 @@
           <p:cNvPr id="2" name="">
             <a:extLst xmlns:a="http://schemas.openxmlformats.org/drawingml/2006/main">
               <a:ext uri="{FF2B5EF4-FFF2-40B4-BE49-F238E27FC236}">
-                <a16:creationId xmlns:a16="http://schemas.microsoft.com/office/drawing/2014/main" id="{3EAAAAC6-D4F9-4982-85E2-3A29C20A1AE7}"/>
+                <a16:creationId xmlns:a16="http://schemas.microsoft.com/office/drawing/2014/main" id="{94329B2A-E37F-4C53-B524-209361F70B71}"/>
               </a:ext>
             </a:extLst>
           </p:cNvPr>
@@ -13408,7 +13363,7 @@
           <p:cNvPr id="3" name="">
             <a:extLst xmlns:a="http://schemas.openxmlformats.org/drawingml/2006/main">
               <a:ext uri="{FF2B5EF4-FFF2-40B4-BE49-F238E27FC236}">
-                <a16:creationId xmlns:a16="http://schemas.microsoft.com/office/drawing/2014/main" id="{76D98A35-1BE8-422F-A735-327B4068F062}"/>
+                <a16:creationId xmlns:a16="http://schemas.microsoft.com/office/drawing/2014/main" id="{6CC43A05-6A14-47DF-BCEF-CCCEBDBC43C0}"/>
               </a:ext>
             </a:extLst>
           </p:cNvPr>
@@ -13476,7 +13431,7 @@
           <p:cNvPr id="4" name="">
             <a:extLst xmlns:a="http://schemas.openxmlformats.org/drawingml/2006/main">
               <a:ext uri="{FF2B5EF4-FFF2-40B4-BE49-F238E27FC236}">
-                <a16:creationId xmlns:a16="http://schemas.microsoft.com/office/drawing/2014/main" id="{48CD9168-A8FB-4B80-AB70-73F4313F0AB6}"/>
+                <a16:creationId xmlns:a16="http://schemas.microsoft.com/office/drawing/2014/main" id="{BEB5CCDD-EC6A-492B-94AE-FCD36D4F0A47}"/>
               </a:ext>
             </a:extLst>
           </p:cNvPr>
@@ -13544,7 +13499,7 @@
           <p:cNvPr id="5" name="">
             <a:extLst xmlns:a="http://schemas.openxmlformats.org/drawingml/2006/main">
               <a:ext uri="{FF2B5EF4-FFF2-40B4-BE49-F238E27FC236}">
-                <a16:creationId xmlns:a16="http://schemas.microsoft.com/office/drawing/2014/main" id="{ECD75854-4453-4DEC-8198-86CF2AA25BB8}"/>
+                <a16:creationId xmlns:a16="http://schemas.microsoft.com/office/drawing/2014/main" id="{281BF7C8-9B81-4D4C-9A0C-35841E93B415}"/>
               </a:ext>
             </a:extLst>
           </p:cNvPr>
@@ -13612,7 +13567,7 @@
           <p:cNvPr id="6" name="">
             <a:extLst xmlns:a="http://schemas.openxmlformats.org/drawingml/2006/main">
               <a:ext uri="{FF2B5EF4-FFF2-40B4-BE49-F238E27FC236}">
-                <a16:creationId xmlns:a16="http://schemas.microsoft.com/office/drawing/2014/main" id="{59E78C19-A8CA-4161-8F0A-7D2241DE43CA}"/>
+                <a16:creationId xmlns:a16="http://schemas.microsoft.com/office/drawing/2014/main" id="{FD8CFCAF-1790-4F88-88A6-EE4168468B6A}"/>
               </a:ext>
             </a:extLst>
           </p:cNvPr>
@@ -13678,7 +13633,7 @@
     </p:spTree>
     <p:extLst>
       <p:ext uri="{BB962C8B-B14F-4D97-AF65-F5344CB8AC3E}">
-        <p14:creationId xmlns:p14="http://schemas.microsoft.com/office/powerpoint/2010/main" val="2013113408"/>
+        <p14:creationId xmlns:p14="http://schemas.microsoft.com/office/powerpoint/2010/main" val="753334006"/>
       </p:ext>
     </p:extLst>
   </p:cSld>
@@ -13709,7 +13664,7 @@
           <p:cNvPr id="7" name="">
             <a:extLst xmlns:a="http://schemas.openxmlformats.org/drawingml/2006/main">
               <a:ext uri="{FF2B5EF4-FFF2-40B4-BE49-F238E27FC236}">
-                <a16:creationId xmlns:a16="http://schemas.microsoft.com/office/drawing/2014/main" id="{E7FD918A-993A-45A5-9320-6432C561A1C4}"/>
+                <a16:creationId xmlns:a16="http://schemas.microsoft.com/office/drawing/2014/main" id="{9355893A-CBE7-47C9-AB5A-203D5D4FA05B}"/>
               </a:ext>
             </a:extLst>
           </p:cNvPr>
@@ -13767,7 +13722,7 @@
                 <a:ea typeface="Microsoft JhengHei"/>
                 <a:cs typeface="Microsoft JhengHei"/>
               </a:rPr>
-              <a:t>成年後的用路責任</a:t>
+              <a:t>重點二　做出安全通學選擇</a:t>
             </a:r>
           </a:p>
         </p:txBody>
@@ -13777,7 +13732,7 @@
           <p:cNvPr id="2" name="">
             <a:extLst xmlns:a="http://schemas.openxmlformats.org/drawingml/2006/main">
               <a:ext uri="{FF2B5EF4-FFF2-40B4-BE49-F238E27FC236}">
-                <a16:creationId xmlns:a16="http://schemas.microsoft.com/office/drawing/2014/main" id="{EC1294E8-6A1C-42B3-8B51-2EC49B096D94}"/>
+                <a16:creationId xmlns:a16="http://schemas.microsoft.com/office/drawing/2014/main" id="{7FFFF045-7A78-4F3C-838B-E6E439679928}"/>
               </a:ext>
             </a:extLst>
           </p:cNvPr>
@@ -13845,7 +13800,7 @@
           <p:cNvPr id="3" name="">
             <a:extLst xmlns:a="http://schemas.openxmlformats.org/drawingml/2006/main">
               <a:ext uri="{FF2B5EF4-FFF2-40B4-BE49-F238E27FC236}">
-                <a16:creationId xmlns:a16="http://schemas.microsoft.com/office/drawing/2014/main" id="{3337A035-CDD4-4ABC-A2D0-BB83DAC8DE21}"/>
+                <a16:creationId xmlns:a16="http://schemas.microsoft.com/office/drawing/2014/main" id="{69396854-866A-4018-ABC9-E070B174A823}"/>
               </a:ext>
             </a:extLst>
           </p:cNvPr>
@@ -13913,7 +13868,7 @@
           <p:cNvPr id="4" name="">
             <a:extLst xmlns:a="http://schemas.openxmlformats.org/drawingml/2006/main">
               <a:ext uri="{FF2B5EF4-FFF2-40B4-BE49-F238E27FC236}">
-                <a16:creationId xmlns:a16="http://schemas.microsoft.com/office/drawing/2014/main" id="{7F8B15E4-C432-47C5-B4E5-32374E392D41}"/>
+                <a16:creationId xmlns:a16="http://schemas.microsoft.com/office/drawing/2014/main" id="{B771DCCF-AF51-48A7-A495-CCB6BAD96BBE}"/>
               </a:ext>
             </a:extLst>
           </p:cNvPr>
@@ -13981,7 +13936,7 @@
           <p:cNvPr id="5" name="">
             <a:extLst xmlns:a="http://schemas.openxmlformats.org/drawingml/2006/main">
               <a:ext uri="{FF2B5EF4-FFF2-40B4-BE49-F238E27FC236}">
-                <a16:creationId xmlns:a16="http://schemas.microsoft.com/office/drawing/2014/main" id="{BAC464C8-8B56-4446-9AD4-D94B4E7BD151}"/>
+                <a16:creationId xmlns:a16="http://schemas.microsoft.com/office/drawing/2014/main" id="{7AE5D800-3579-4D0B-9916-852B868CC0F8}"/>
               </a:ext>
             </a:extLst>
           </p:cNvPr>
@@ -14049,7 +14004,7 @@
           <p:cNvPr id="6" name="">
             <a:extLst xmlns:a="http://schemas.openxmlformats.org/drawingml/2006/main">
               <a:ext uri="{FF2B5EF4-FFF2-40B4-BE49-F238E27FC236}">
-                <a16:creationId xmlns:a16="http://schemas.microsoft.com/office/drawing/2014/main" id="{1CCA84D4-C481-4C36-A346-0844971542EA}"/>
+                <a16:creationId xmlns:a16="http://schemas.microsoft.com/office/drawing/2014/main" id="{C1D727E7-A6A5-4E06-A8B9-A43FAA79FA55}"/>
               </a:ext>
             </a:extLst>
           </p:cNvPr>
@@ -14115,7 +14070,7 @@
     </p:spTree>
     <p:extLst>
       <p:ext uri="{BB962C8B-B14F-4D97-AF65-F5344CB8AC3E}">
-        <p14:creationId xmlns:p14="http://schemas.microsoft.com/office/powerpoint/2010/main" val="423081518"/>
+        <p14:creationId xmlns:p14="http://schemas.microsoft.com/office/powerpoint/2010/main" val="1423664371"/>
       </p:ext>
     </p:extLst>
   </p:cSld>
